--- a/Language Identification System for Short Text.pptx
+++ b/Language Identification System for Short Text.pptx
@@ -4448,927 +4448,6 @@
 </file>
 
 <file path=ppt/diagrams/colors6.xml><?xml version="1.0" encoding="utf-8"?>
-<dgm:colorsDef xmlns:dgm="http://schemas.openxmlformats.org/drawingml/2006/diagram" xmlns:a="http://schemas.openxmlformats.org/drawingml/2006/main" uniqueId="urn:microsoft.com/office/officeart/2018/5/colors/Iconchunking_neutralicontext_colorful1">
-  <dgm:title val=""/>
-  <dgm:desc val=""/>
-  <dgm:catLst>
-    <dgm:cat type="colorful" pri="10100"/>
-  </dgm:catLst>
-  <dgm:styleLbl name="node0">
-    <dgm:fillClrLst meth="repeat">
-      <a:schemeClr val="accent1"/>
-    </dgm:fillClrLst>
-    <dgm:linClrLst meth="repeat">
-      <a:schemeClr val="lt1"/>
-    </dgm:linClrLst>
-    <dgm:effectClrLst/>
-    <dgm:txLinClrLst/>
-    <dgm:txFillClrLst/>
-    <dgm:txEffectClrLst/>
-  </dgm:styleLbl>
-  <dgm:styleLbl name="node1">
-    <dgm:fillClrLst meth="repeat">
-      <a:schemeClr val="bg1"/>
-    </dgm:fillClrLst>
-    <dgm:linClrLst meth="repeat">
-      <a:schemeClr val="lt1">
-        <a:alpha val="0"/>
-      </a:schemeClr>
-    </dgm:linClrLst>
-    <dgm:effectClrLst/>
-    <dgm:txLinClrLst/>
-    <dgm:txFillClrLst meth="repeat">
-      <a:schemeClr val="dk1"/>
-    </dgm:txFillClrLst>
-    <dgm:txEffectClrLst/>
-  </dgm:styleLbl>
-  <dgm:styleLbl name="alignNode1">
-    <dgm:fillClrLst meth="repeat">
-      <a:schemeClr val="accent2"/>
-      <a:schemeClr val="accent3"/>
-      <a:schemeClr val="accent4"/>
-      <a:schemeClr val="accent5"/>
-      <a:schemeClr val="accent6"/>
-    </dgm:fillClrLst>
-    <dgm:linClrLst meth="repeat">
-      <a:schemeClr val="accent2"/>
-      <a:schemeClr val="accent3"/>
-      <a:schemeClr val="accent4"/>
-      <a:schemeClr val="accent5"/>
-      <a:schemeClr val="accent6"/>
-    </dgm:linClrLst>
-    <dgm:effectClrLst/>
-    <dgm:txLinClrLst/>
-    <dgm:txFillClrLst/>
-    <dgm:txEffectClrLst/>
-  </dgm:styleLbl>
-  <dgm:styleLbl name="lnNode1">
-    <dgm:fillClrLst meth="repeat">
-      <a:schemeClr val="accent2"/>
-      <a:schemeClr val="accent3"/>
-      <a:schemeClr val="accent4"/>
-      <a:schemeClr val="accent5"/>
-      <a:schemeClr val="accent6"/>
-    </dgm:fillClrLst>
-    <dgm:linClrLst meth="repeat">
-      <a:schemeClr val="lt1"/>
-    </dgm:linClrLst>
-    <dgm:effectClrLst/>
-    <dgm:txLinClrLst/>
-    <dgm:txFillClrLst/>
-    <dgm:txEffectClrLst/>
-  </dgm:styleLbl>
-  <dgm:styleLbl name="vennNode1">
-    <dgm:fillClrLst meth="repeat">
-      <a:schemeClr val="accent2">
-        <a:alpha val="50000"/>
-      </a:schemeClr>
-      <a:schemeClr val="accent3">
-        <a:alpha val="50000"/>
-      </a:schemeClr>
-      <a:schemeClr val="accent4">
-        <a:alpha val="50000"/>
-      </a:schemeClr>
-      <a:schemeClr val="accent5">
-        <a:alpha val="50000"/>
-      </a:schemeClr>
-      <a:schemeClr val="accent6">
-        <a:alpha val="50000"/>
-      </a:schemeClr>
-    </dgm:fillClrLst>
-    <dgm:linClrLst meth="repeat">
-      <a:schemeClr val="lt1"/>
-    </dgm:linClrLst>
-    <dgm:effectClrLst/>
-    <dgm:txLinClrLst/>
-    <dgm:txFillClrLst/>
-    <dgm:txEffectClrLst/>
-  </dgm:styleLbl>
-  <dgm:styleLbl name="node2">
-    <dgm:fillClrLst>
-      <a:schemeClr val="accent2"/>
-    </dgm:fillClrLst>
-    <dgm:linClrLst meth="repeat">
-      <a:schemeClr val="lt1"/>
-    </dgm:linClrLst>
-    <dgm:effectClrLst/>
-    <dgm:txLinClrLst/>
-    <dgm:txFillClrLst/>
-    <dgm:txEffectClrLst/>
-  </dgm:styleLbl>
-  <dgm:styleLbl name="node3">
-    <dgm:fillClrLst>
-      <a:schemeClr val="accent3"/>
-    </dgm:fillClrLst>
-    <dgm:linClrLst meth="repeat">
-      <a:schemeClr val="lt1"/>
-    </dgm:linClrLst>
-    <dgm:effectClrLst/>
-    <dgm:txLinClrLst/>
-    <dgm:txFillClrLst/>
-    <dgm:txEffectClrLst/>
-  </dgm:styleLbl>
-  <dgm:styleLbl name="node4">
-    <dgm:fillClrLst>
-      <a:schemeClr val="accent4"/>
-    </dgm:fillClrLst>
-    <dgm:linClrLst meth="repeat">
-      <a:schemeClr val="lt1"/>
-    </dgm:linClrLst>
-    <dgm:effectClrLst/>
-    <dgm:txLinClrLst/>
-    <dgm:txFillClrLst/>
-    <dgm:txEffectClrLst/>
-  </dgm:styleLbl>
-  <dgm:styleLbl name="fgImgPlace1">
-    <dgm:fillClrLst meth="repeat">
-      <a:schemeClr val="accent2">
-        <a:tint val="50000"/>
-      </a:schemeClr>
-      <a:schemeClr val="accent3">
-        <a:tint val="50000"/>
-      </a:schemeClr>
-      <a:schemeClr val="accent4">
-        <a:tint val="50000"/>
-      </a:schemeClr>
-      <a:schemeClr val="accent5">
-        <a:tint val="50000"/>
-      </a:schemeClr>
-      <a:schemeClr val="accent6">
-        <a:tint val="50000"/>
-      </a:schemeClr>
-    </dgm:fillClrLst>
-    <dgm:linClrLst meth="repeat">
-      <a:schemeClr val="lt1"/>
-    </dgm:linClrLst>
-    <dgm:effectClrLst/>
-    <dgm:txLinClrLst/>
-    <dgm:txFillClrLst meth="repeat">
-      <a:schemeClr val="lt1"/>
-    </dgm:txFillClrLst>
-    <dgm:txEffectClrLst/>
-  </dgm:styleLbl>
-  <dgm:styleLbl name="alignImgPlace1">
-    <dgm:fillClrLst>
-      <a:schemeClr val="accent1">
-        <a:tint val="50000"/>
-      </a:schemeClr>
-      <a:schemeClr val="accent2">
-        <a:tint val="20000"/>
-      </a:schemeClr>
-    </dgm:fillClrLst>
-    <dgm:linClrLst meth="repeat">
-      <a:schemeClr val="lt1"/>
-    </dgm:linClrLst>
-    <dgm:effectClrLst/>
-    <dgm:txLinClrLst/>
-    <dgm:txFillClrLst meth="repeat">
-      <a:schemeClr val="lt1"/>
-    </dgm:txFillClrLst>
-    <dgm:txEffectClrLst/>
-  </dgm:styleLbl>
-  <dgm:styleLbl name="bgImgPlace1">
-    <dgm:fillClrLst>
-      <a:schemeClr val="accent1">
-        <a:tint val="50000"/>
-      </a:schemeClr>
-      <a:schemeClr val="accent2">
-        <a:tint val="20000"/>
-      </a:schemeClr>
-    </dgm:fillClrLst>
-    <dgm:linClrLst meth="repeat">
-      <a:schemeClr val="lt1"/>
-    </dgm:linClrLst>
-    <dgm:effectClrLst/>
-    <dgm:txLinClrLst/>
-    <dgm:txFillClrLst meth="repeat">
-      <a:schemeClr val="lt1"/>
-    </dgm:txFillClrLst>
-    <dgm:txEffectClrLst/>
-  </dgm:styleLbl>
-  <dgm:styleLbl name="sibTrans2D1">
-    <dgm:fillClrLst meth="repeat">
-      <a:schemeClr val="accent2"/>
-      <a:schemeClr val="accent3"/>
-      <a:schemeClr val="accent4"/>
-      <a:schemeClr val="accent5"/>
-      <a:schemeClr val="accent6"/>
-    </dgm:fillClrLst>
-    <dgm:linClrLst meth="cycle">
-      <a:schemeClr val="lt1"/>
-    </dgm:linClrLst>
-    <dgm:effectClrLst/>
-    <dgm:txLinClrLst/>
-    <dgm:txFillClrLst/>
-    <dgm:txEffectClrLst/>
-  </dgm:styleLbl>
-  <dgm:styleLbl name="fgSibTrans2D1">
-    <dgm:fillClrLst meth="repeat">
-      <a:schemeClr val="accent2"/>
-      <a:schemeClr val="accent3"/>
-      <a:schemeClr val="accent4"/>
-      <a:schemeClr val="accent5"/>
-      <a:schemeClr val="accent6"/>
-    </dgm:fillClrLst>
-    <dgm:linClrLst meth="cycle">
-      <a:schemeClr val="lt1"/>
-    </dgm:linClrLst>
-    <dgm:effectClrLst/>
-    <dgm:txLinClrLst/>
-    <dgm:txFillClrLst meth="repeat">
-      <a:schemeClr val="lt1"/>
-    </dgm:txFillClrLst>
-    <dgm:txEffectClrLst/>
-  </dgm:styleLbl>
-  <dgm:styleLbl name="bgSibTrans2D1">
-    <dgm:fillClrLst meth="repeat">
-      <a:schemeClr val="accent2"/>
-      <a:schemeClr val="accent3"/>
-      <a:schemeClr val="accent4"/>
-      <a:schemeClr val="accent5"/>
-      <a:schemeClr val="accent6"/>
-    </dgm:fillClrLst>
-    <dgm:linClrLst meth="cycle">
-      <a:schemeClr val="lt1"/>
-    </dgm:linClrLst>
-    <dgm:effectClrLst/>
-    <dgm:txLinClrLst/>
-    <dgm:txFillClrLst meth="repeat">
-      <a:schemeClr val="lt1"/>
-    </dgm:txFillClrLst>
-    <dgm:txEffectClrLst/>
-  </dgm:styleLbl>
-  <dgm:styleLbl name="sibTrans1D1">
-    <dgm:fillClrLst meth="repeat">
-      <a:schemeClr val="accent2"/>
-      <a:schemeClr val="accent3"/>
-      <a:schemeClr val="accent4"/>
-      <a:schemeClr val="accent5"/>
-      <a:schemeClr val="accent6"/>
-    </dgm:fillClrLst>
-    <dgm:linClrLst meth="repeat">
-      <a:schemeClr val="accent2"/>
-      <a:schemeClr val="accent3"/>
-      <a:schemeClr val="accent4"/>
-      <a:schemeClr val="accent5"/>
-      <a:schemeClr val="accent6"/>
-    </dgm:linClrLst>
-    <dgm:effectClrLst/>
-    <dgm:txLinClrLst/>
-    <dgm:txFillClrLst meth="repeat">
-      <a:schemeClr val="tx1"/>
-    </dgm:txFillClrLst>
-    <dgm:txEffectClrLst/>
-  </dgm:styleLbl>
-  <dgm:styleLbl name="callout">
-    <dgm:fillClrLst meth="repeat">
-      <a:schemeClr val="accent2"/>
-    </dgm:fillClrLst>
-    <dgm:linClrLst meth="repeat">
-      <a:schemeClr val="accent2">
-        <a:tint val="50000"/>
-      </a:schemeClr>
-    </dgm:linClrLst>
-    <dgm:effectClrLst/>
-    <dgm:txLinClrLst/>
-    <dgm:txFillClrLst meth="repeat">
-      <a:schemeClr val="tx1"/>
-    </dgm:txFillClrLst>
-    <dgm:txEffectClrLst/>
-  </dgm:styleLbl>
-  <dgm:styleLbl name="asst0">
-    <dgm:fillClrLst meth="repeat">
-      <a:schemeClr val="accent1"/>
-    </dgm:fillClrLst>
-    <dgm:linClrLst meth="repeat">
-      <a:schemeClr val="lt1"/>
-    </dgm:linClrLst>
-    <dgm:effectClrLst/>
-    <dgm:txLinClrLst/>
-    <dgm:txFillClrLst/>
-    <dgm:txEffectClrLst/>
-  </dgm:styleLbl>
-  <dgm:styleLbl name="asst1">
-    <dgm:fillClrLst meth="repeat">
-      <a:schemeClr val="accent2"/>
-    </dgm:fillClrLst>
-    <dgm:linClrLst meth="repeat">
-      <a:schemeClr val="lt1"/>
-    </dgm:linClrLst>
-    <dgm:effectClrLst/>
-    <dgm:txLinClrLst/>
-    <dgm:txFillClrLst/>
-    <dgm:txEffectClrLst/>
-  </dgm:styleLbl>
-  <dgm:styleLbl name="asst2">
-    <dgm:fillClrLst>
-      <a:schemeClr val="accent3"/>
-    </dgm:fillClrLst>
-    <dgm:linClrLst meth="repeat">
-      <a:schemeClr val="lt1"/>
-    </dgm:linClrLst>
-    <dgm:effectClrLst/>
-    <dgm:txLinClrLst/>
-    <dgm:txFillClrLst/>
-    <dgm:txEffectClrLst/>
-  </dgm:styleLbl>
-  <dgm:styleLbl name="asst3">
-    <dgm:fillClrLst>
-      <a:schemeClr val="accent4"/>
-    </dgm:fillClrLst>
-    <dgm:linClrLst meth="repeat">
-      <a:schemeClr val="lt1"/>
-    </dgm:linClrLst>
-    <dgm:effectClrLst/>
-    <dgm:txLinClrLst/>
-    <dgm:txFillClrLst/>
-    <dgm:txEffectClrLst/>
-  </dgm:styleLbl>
-  <dgm:styleLbl name="asst4">
-    <dgm:fillClrLst>
-      <a:schemeClr val="accent5"/>
-    </dgm:fillClrLst>
-    <dgm:linClrLst meth="repeat">
-      <a:schemeClr val="lt1"/>
-    </dgm:linClrLst>
-    <dgm:effectClrLst/>
-    <dgm:txLinClrLst/>
-    <dgm:txFillClrLst/>
-    <dgm:txEffectClrLst/>
-  </dgm:styleLbl>
-  <dgm:styleLbl name="parChTrans2D1">
-    <dgm:fillClrLst meth="repeat">
-      <a:schemeClr val="accent2"/>
-    </dgm:fillClrLst>
-    <dgm:linClrLst meth="repeat">
-      <a:schemeClr val="lt1"/>
-    </dgm:linClrLst>
-    <dgm:effectClrLst/>
-    <dgm:txLinClrLst/>
-    <dgm:txFillClrLst meth="repeat">
-      <a:schemeClr val="lt1"/>
-    </dgm:txFillClrLst>
-    <dgm:txEffectClrLst/>
-  </dgm:styleLbl>
-  <dgm:styleLbl name="parChTrans2D2">
-    <dgm:fillClrLst meth="repeat">
-      <a:schemeClr val="accent3"/>
-    </dgm:fillClrLst>
-    <dgm:linClrLst meth="repeat">
-      <a:schemeClr val="lt1"/>
-    </dgm:linClrLst>
-    <dgm:effectClrLst/>
-    <dgm:txLinClrLst/>
-    <dgm:txFillClrLst/>
-    <dgm:txEffectClrLst/>
-  </dgm:styleLbl>
-  <dgm:styleLbl name="parChTrans2D3">
-    <dgm:fillClrLst meth="repeat">
-      <a:schemeClr val="accent4"/>
-    </dgm:fillClrLst>
-    <dgm:linClrLst meth="repeat">
-      <a:schemeClr val="lt1"/>
-    </dgm:linClrLst>
-    <dgm:effectClrLst/>
-    <dgm:txLinClrLst/>
-    <dgm:txFillClrLst/>
-    <dgm:txEffectClrLst/>
-  </dgm:styleLbl>
-  <dgm:styleLbl name="parChTrans2D4">
-    <dgm:fillClrLst meth="repeat">
-      <a:schemeClr val="accent5"/>
-    </dgm:fillClrLst>
-    <dgm:linClrLst meth="repeat">
-      <a:schemeClr val="lt1"/>
-    </dgm:linClrLst>
-    <dgm:effectClrLst/>
-    <dgm:txLinClrLst/>
-    <dgm:txFillClrLst meth="repeat">
-      <a:schemeClr val="lt1"/>
-    </dgm:txFillClrLst>
-    <dgm:txEffectClrLst/>
-  </dgm:styleLbl>
-  <dgm:styleLbl name="parChTrans1D1">
-    <dgm:fillClrLst meth="repeat">
-      <a:schemeClr val="accent2"/>
-    </dgm:fillClrLst>
-    <dgm:linClrLst meth="repeat">
-      <a:schemeClr val="accent1"/>
-    </dgm:linClrLst>
-    <dgm:effectClrLst/>
-    <dgm:txLinClrLst/>
-    <dgm:txFillClrLst meth="repeat">
-      <a:schemeClr val="tx1"/>
-    </dgm:txFillClrLst>
-    <dgm:txEffectClrLst/>
-  </dgm:styleLbl>
-  <dgm:styleLbl name="parChTrans1D2">
-    <dgm:fillClrLst meth="repeat">
-      <a:schemeClr val="accent3">
-        <a:tint val="90000"/>
-      </a:schemeClr>
-    </dgm:fillClrLst>
-    <dgm:linClrLst meth="repeat">
-      <a:schemeClr val="accent2"/>
-    </dgm:linClrLst>
-    <dgm:effectClrLst/>
-    <dgm:txLinClrLst/>
-    <dgm:txFillClrLst meth="repeat">
-      <a:schemeClr val="tx1"/>
-    </dgm:txFillClrLst>
-    <dgm:txEffectClrLst/>
-  </dgm:styleLbl>
-  <dgm:styleLbl name="parChTrans1D3">
-    <dgm:fillClrLst meth="repeat">
-      <a:schemeClr val="accent4">
-        <a:tint val="70000"/>
-      </a:schemeClr>
-    </dgm:fillClrLst>
-    <dgm:linClrLst meth="repeat">
-      <a:schemeClr val="accent3"/>
-    </dgm:linClrLst>
-    <dgm:effectClrLst/>
-    <dgm:txLinClrLst/>
-    <dgm:txFillClrLst meth="repeat">
-      <a:schemeClr val="tx1"/>
-    </dgm:txFillClrLst>
-    <dgm:txEffectClrLst/>
-  </dgm:styleLbl>
-  <dgm:styleLbl name="parChTrans1D4">
-    <dgm:fillClrLst meth="repeat">
-      <a:schemeClr val="accent5">
-        <a:tint val="50000"/>
-      </a:schemeClr>
-    </dgm:fillClrLst>
-    <dgm:linClrLst meth="repeat">
-      <a:schemeClr val="accent4"/>
-    </dgm:linClrLst>
-    <dgm:effectClrLst/>
-    <dgm:txLinClrLst/>
-    <dgm:txFillClrLst meth="repeat">
-      <a:schemeClr val="tx1"/>
-    </dgm:txFillClrLst>
-    <dgm:txEffectClrLst/>
-  </dgm:styleLbl>
-  <dgm:styleLbl name="fgAcc1">
-    <dgm:fillClrLst meth="repeat">
-      <a:schemeClr val="lt1">
-        <a:alpha val="90000"/>
-      </a:schemeClr>
-    </dgm:fillClrLst>
-    <dgm:linClrLst meth="repeat">
-      <a:schemeClr val="accent2"/>
-      <a:schemeClr val="accent3"/>
-      <a:schemeClr val="accent4"/>
-      <a:schemeClr val="accent5"/>
-      <a:schemeClr val="accent6"/>
-    </dgm:linClrLst>
-    <dgm:effectClrLst/>
-    <dgm:txLinClrLst/>
-    <dgm:txFillClrLst meth="repeat">
-      <a:schemeClr val="dk1"/>
-    </dgm:txFillClrLst>
-    <dgm:txEffectClrLst/>
-  </dgm:styleLbl>
-  <dgm:styleLbl name="conFgAcc1">
-    <dgm:fillClrLst meth="repeat">
-      <a:schemeClr val="lt1">
-        <a:alpha val="90000"/>
-      </a:schemeClr>
-    </dgm:fillClrLst>
-    <dgm:linClrLst meth="repeat">
-      <a:schemeClr val="accent2"/>
-      <a:schemeClr val="accent3"/>
-      <a:schemeClr val="accent4"/>
-      <a:schemeClr val="accent5"/>
-      <a:schemeClr val="accent6"/>
-    </dgm:linClrLst>
-    <dgm:effectClrLst/>
-    <dgm:txLinClrLst/>
-    <dgm:txFillClrLst meth="repeat">
-      <a:schemeClr val="dk1"/>
-    </dgm:txFillClrLst>
-    <dgm:txEffectClrLst/>
-  </dgm:styleLbl>
-  <dgm:styleLbl name="alignAcc1">
-    <dgm:fillClrLst meth="repeat">
-      <a:schemeClr val="lt1">
-        <a:alpha val="90000"/>
-      </a:schemeClr>
-    </dgm:fillClrLst>
-    <dgm:linClrLst meth="repeat">
-      <a:schemeClr val="accent2"/>
-      <a:schemeClr val="accent3"/>
-      <a:schemeClr val="accent4"/>
-      <a:schemeClr val="accent5"/>
-      <a:schemeClr val="accent6"/>
-    </dgm:linClrLst>
-    <dgm:effectClrLst/>
-    <dgm:txLinClrLst/>
-    <dgm:txFillClrLst meth="repeat">
-      <a:schemeClr val="dk1"/>
-    </dgm:txFillClrLst>
-    <dgm:txEffectClrLst/>
-  </dgm:styleLbl>
-  <dgm:styleLbl name="trAlignAcc1">
-    <dgm:fillClrLst meth="repeat">
-      <a:schemeClr val="lt1">
-        <a:alpha val="40000"/>
-      </a:schemeClr>
-    </dgm:fillClrLst>
-    <dgm:linClrLst meth="repeat">
-      <a:schemeClr val="accent1"/>
-    </dgm:linClrLst>
-    <dgm:effectClrLst/>
-    <dgm:txLinClrLst/>
-    <dgm:txFillClrLst meth="repeat">
-      <a:schemeClr val="dk1"/>
-    </dgm:txFillClrLst>
-    <dgm:txEffectClrLst/>
-  </dgm:styleLbl>
-  <dgm:styleLbl name="bgAcc1">
-    <dgm:fillClrLst meth="repeat">
-      <a:schemeClr val="lt1">
-        <a:alpha val="90000"/>
-      </a:schemeClr>
-    </dgm:fillClrLst>
-    <dgm:linClrLst meth="repeat">
-      <a:schemeClr val="accent2"/>
-      <a:schemeClr val="accent3"/>
-      <a:schemeClr val="accent4"/>
-      <a:schemeClr val="accent5"/>
-      <a:schemeClr val="accent6"/>
-    </dgm:linClrLst>
-    <dgm:effectClrLst/>
-    <dgm:txLinClrLst/>
-    <dgm:txFillClrLst meth="repeat">
-      <a:schemeClr val="dk1"/>
-    </dgm:txFillClrLst>
-    <dgm:txEffectClrLst/>
-  </dgm:styleLbl>
-  <dgm:styleLbl name="solidFgAcc1">
-    <dgm:fillClrLst meth="repeat">
-      <a:schemeClr val="lt1"/>
-    </dgm:fillClrLst>
-    <dgm:linClrLst meth="repeat">
-      <a:schemeClr val="accent2"/>
-      <a:schemeClr val="accent3"/>
-      <a:schemeClr val="accent4"/>
-      <a:schemeClr val="accent5"/>
-      <a:schemeClr val="accent6"/>
-    </dgm:linClrLst>
-    <dgm:effectClrLst/>
-    <dgm:txLinClrLst/>
-    <dgm:txFillClrLst meth="repeat">
-      <a:schemeClr val="dk1"/>
-    </dgm:txFillClrLst>
-    <dgm:txEffectClrLst/>
-  </dgm:styleLbl>
-  <dgm:styleLbl name="solidAlignAcc1">
-    <dgm:fillClrLst meth="repeat">
-      <a:schemeClr val="lt1"/>
-    </dgm:fillClrLst>
-    <dgm:linClrLst meth="repeat">
-      <a:schemeClr val="accent2"/>
-      <a:schemeClr val="accent3"/>
-      <a:schemeClr val="accent4"/>
-      <a:schemeClr val="accent5"/>
-      <a:schemeClr val="accent6"/>
-    </dgm:linClrLst>
-    <dgm:effectClrLst/>
-    <dgm:txLinClrLst/>
-    <dgm:txFillClrLst meth="repeat">
-      <a:schemeClr val="dk1"/>
-    </dgm:txFillClrLst>
-    <dgm:txEffectClrLst/>
-  </dgm:styleLbl>
-  <dgm:styleLbl name="solidBgAcc1">
-    <dgm:fillClrLst meth="repeat">
-      <a:schemeClr val="lt1"/>
-    </dgm:fillClrLst>
-    <dgm:linClrLst meth="repeat">
-      <a:schemeClr val="accent2"/>
-      <a:schemeClr val="accent3"/>
-      <a:schemeClr val="accent4"/>
-      <a:schemeClr val="accent5"/>
-      <a:schemeClr val="accent6"/>
-    </dgm:linClrLst>
-    <dgm:effectClrLst/>
-    <dgm:txLinClrLst/>
-    <dgm:txFillClrLst meth="repeat">
-      <a:schemeClr val="dk1"/>
-    </dgm:txFillClrLst>
-    <dgm:txEffectClrLst/>
-  </dgm:styleLbl>
-  <dgm:styleLbl name="fgAccFollowNode1">
-    <dgm:fillClrLst meth="repeat">
-      <a:schemeClr val="accent2">
-        <a:tint val="40000"/>
-        <a:alpha val="90000"/>
-      </a:schemeClr>
-      <a:schemeClr val="accent3">
-        <a:tint val="40000"/>
-        <a:alpha val="90000"/>
-      </a:schemeClr>
-      <a:schemeClr val="accent4">
-        <a:tint val="40000"/>
-        <a:alpha val="90000"/>
-      </a:schemeClr>
-      <a:schemeClr val="accent5">
-        <a:tint val="40000"/>
-        <a:alpha val="90000"/>
-      </a:schemeClr>
-      <a:schemeClr val="accent6">
-        <a:tint val="40000"/>
-        <a:alpha val="90000"/>
-      </a:schemeClr>
-    </dgm:fillClrLst>
-    <dgm:linClrLst meth="repeat">
-      <a:schemeClr val="accent2">
-        <a:tint val="40000"/>
-        <a:alpha val="90000"/>
-      </a:schemeClr>
-      <a:schemeClr val="accent3">
-        <a:tint val="40000"/>
-        <a:alpha val="90000"/>
-      </a:schemeClr>
-      <a:schemeClr val="accent4">
-        <a:tint val="40000"/>
-        <a:alpha val="90000"/>
-      </a:schemeClr>
-      <a:schemeClr val="accent5">
-        <a:tint val="40000"/>
-        <a:alpha val="90000"/>
-      </a:schemeClr>
-      <a:schemeClr val="accent6">
-        <a:tint val="40000"/>
-        <a:alpha val="90000"/>
-      </a:schemeClr>
-    </dgm:linClrLst>
-    <dgm:effectClrLst/>
-    <dgm:txLinClrLst/>
-    <dgm:txFillClrLst meth="repeat">
-      <a:schemeClr val="dk1"/>
-    </dgm:txFillClrLst>
-    <dgm:txEffectClrLst/>
-  </dgm:styleLbl>
-  <dgm:styleLbl name="alignAccFollowNode1">
-    <dgm:fillClrLst meth="repeat">
-      <a:schemeClr val="accent2">
-        <a:tint val="40000"/>
-        <a:alpha val="90000"/>
-      </a:schemeClr>
-      <a:schemeClr val="accent3">
-        <a:tint val="40000"/>
-        <a:alpha val="90000"/>
-      </a:schemeClr>
-      <a:schemeClr val="accent4">
-        <a:tint val="40000"/>
-        <a:alpha val="90000"/>
-      </a:schemeClr>
-      <a:schemeClr val="accent5">
-        <a:tint val="40000"/>
-        <a:alpha val="90000"/>
-      </a:schemeClr>
-      <a:schemeClr val="accent6">
-        <a:tint val="40000"/>
-        <a:alpha val="90000"/>
-      </a:schemeClr>
-    </dgm:fillClrLst>
-    <dgm:linClrLst meth="repeat">
-      <a:schemeClr val="accent2">
-        <a:tint val="40000"/>
-        <a:alpha val="90000"/>
-      </a:schemeClr>
-      <a:schemeClr val="accent3">
-        <a:tint val="40000"/>
-        <a:alpha val="90000"/>
-      </a:schemeClr>
-      <a:schemeClr val="accent4">
-        <a:tint val="40000"/>
-        <a:alpha val="90000"/>
-      </a:schemeClr>
-      <a:schemeClr val="accent5">
-        <a:tint val="40000"/>
-        <a:alpha val="90000"/>
-      </a:schemeClr>
-      <a:schemeClr val="accent6">
-        <a:tint val="40000"/>
-        <a:alpha val="90000"/>
-      </a:schemeClr>
-    </dgm:linClrLst>
-    <dgm:effectClrLst/>
-    <dgm:txLinClrLst/>
-    <dgm:txFillClrLst meth="repeat">
-      <a:schemeClr val="dk1"/>
-    </dgm:txFillClrLst>
-    <dgm:txEffectClrLst/>
-  </dgm:styleLbl>
-  <dgm:styleLbl name="bgAccFollowNode1">
-    <dgm:fillClrLst meth="repeat">
-      <a:schemeClr val="accent2">
-        <a:tint val="40000"/>
-        <a:alpha val="90000"/>
-      </a:schemeClr>
-      <a:schemeClr val="accent3">
-        <a:tint val="40000"/>
-        <a:alpha val="90000"/>
-      </a:schemeClr>
-      <a:schemeClr val="accent4">
-        <a:tint val="40000"/>
-        <a:alpha val="90000"/>
-      </a:schemeClr>
-      <a:schemeClr val="accent5">
-        <a:tint val="40000"/>
-        <a:alpha val="90000"/>
-      </a:schemeClr>
-      <a:schemeClr val="accent6">
-        <a:tint val="40000"/>
-        <a:alpha val="90000"/>
-      </a:schemeClr>
-    </dgm:fillClrLst>
-    <dgm:linClrLst meth="repeat">
-      <a:schemeClr val="accent2">
-        <a:tint val="40000"/>
-        <a:alpha val="90000"/>
-      </a:schemeClr>
-      <a:schemeClr val="accent3">
-        <a:tint val="40000"/>
-        <a:alpha val="90000"/>
-      </a:schemeClr>
-      <a:schemeClr val="accent4">
-        <a:tint val="40000"/>
-        <a:alpha val="90000"/>
-      </a:schemeClr>
-      <a:schemeClr val="accent5">
-        <a:tint val="40000"/>
-        <a:alpha val="90000"/>
-      </a:schemeClr>
-      <a:schemeClr val="accent6">
-        <a:tint val="40000"/>
-        <a:alpha val="90000"/>
-      </a:schemeClr>
-    </dgm:linClrLst>
-    <dgm:effectClrLst/>
-    <dgm:txLinClrLst/>
-    <dgm:txFillClrLst meth="repeat">
-      <a:schemeClr val="dk1"/>
-    </dgm:txFillClrLst>
-    <dgm:txEffectClrLst/>
-  </dgm:styleLbl>
-  <dgm:styleLbl name="fgAcc0">
-    <dgm:fillClrLst meth="repeat">
-      <a:schemeClr val="lt1">
-        <a:alpha val="90000"/>
-      </a:schemeClr>
-    </dgm:fillClrLst>
-    <dgm:linClrLst>
-      <a:schemeClr val="accent1"/>
-    </dgm:linClrLst>
-    <dgm:effectClrLst/>
-    <dgm:txLinClrLst/>
-    <dgm:txFillClrLst meth="repeat">
-      <a:schemeClr val="dk1"/>
-    </dgm:txFillClrLst>
-    <dgm:txEffectClrLst/>
-  </dgm:styleLbl>
-  <dgm:styleLbl name="fgAcc2">
-    <dgm:fillClrLst meth="repeat">
-      <a:schemeClr val="lt1">
-        <a:alpha val="90000"/>
-      </a:schemeClr>
-    </dgm:fillClrLst>
-    <dgm:linClrLst>
-      <a:schemeClr val="accent2"/>
-    </dgm:linClrLst>
-    <dgm:effectClrLst/>
-    <dgm:txLinClrLst/>
-    <dgm:txFillClrLst meth="repeat">
-      <a:schemeClr val="dk1"/>
-    </dgm:txFillClrLst>
-    <dgm:txEffectClrLst/>
-  </dgm:styleLbl>
-  <dgm:styleLbl name="fgAcc3">
-    <dgm:fillClrLst meth="repeat">
-      <a:schemeClr val="lt1">
-        <a:alpha val="90000"/>
-      </a:schemeClr>
-    </dgm:fillClrLst>
-    <dgm:linClrLst>
-      <a:schemeClr val="accent3"/>
-    </dgm:linClrLst>
-    <dgm:effectClrLst/>
-    <dgm:txLinClrLst/>
-    <dgm:txFillClrLst meth="repeat">
-      <a:schemeClr val="dk1"/>
-    </dgm:txFillClrLst>
-    <dgm:txEffectClrLst/>
-  </dgm:styleLbl>
-  <dgm:styleLbl name="fgAcc4">
-    <dgm:fillClrLst meth="repeat">
-      <a:schemeClr val="lt1">
-        <a:alpha val="90000"/>
-      </a:schemeClr>
-    </dgm:fillClrLst>
-    <dgm:linClrLst>
-      <a:schemeClr val="accent4"/>
-    </dgm:linClrLst>
-    <dgm:effectClrLst/>
-    <dgm:txLinClrLst/>
-    <dgm:txFillClrLst meth="repeat">
-      <a:schemeClr val="dk1"/>
-    </dgm:txFillClrLst>
-    <dgm:txEffectClrLst/>
-  </dgm:styleLbl>
-  <dgm:styleLbl name="bgShp">
-    <dgm:fillClrLst meth="repeat">
-      <a:schemeClr val="accent2"/>
-      <a:schemeClr val="accent3"/>
-      <a:schemeClr val="accent4"/>
-      <a:schemeClr val="accent5"/>
-      <a:schemeClr val="accent6"/>
-    </dgm:fillClrLst>
-    <dgm:linClrLst meth="repeat">
-      <a:schemeClr val="lt1">
-        <a:alpha val="0"/>
-      </a:schemeClr>
-    </dgm:linClrLst>
-    <dgm:effectClrLst/>
-    <dgm:txLinClrLst/>
-    <dgm:txFillClrLst/>
-    <dgm:txEffectClrLst/>
-  </dgm:styleLbl>
-  <dgm:styleLbl name="dkBgShp">
-    <dgm:fillClrLst meth="repeat">
-      <a:schemeClr val="accent2">
-        <a:shade val="90000"/>
-      </a:schemeClr>
-    </dgm:fillClrLst>
-    <dgm:linClrLst meth="repeat">
-      <a:schemeClr val="dk1"/>
-    </dgm:linClrLst>
-    <dgm:effectClrLst/>
-    <dgm:txLinClrLst/>
-    <dgm:txFillClrLst meth="repeat">
-      <a:schemeClr val="lt1"/>
-    </dgm:txFillClrLst>
-    <dgm:txEffectClrLst/>
-  </dgm:styleLbl>
-  <dgm:styleLbl name="trBgShp">
-    <dgm:fillClrLst meth="repeat">
-      <a:schemeClr val="accent1">
-        <a:tint val="50000"/>
-        <a:alpha val="40000"/>
-      </a:schemeClr>
-    </dgm:fillClrLst>
-    <dgm:linClrLst meth="repeat">
-      <a:schemeClr val="accent2"/>
-    </dgm:linClrLst>
-    <dgm:effectClrLst/>
-    <dgm:txLinClrLst/>
-    <dgm:txFillClrLst meth="repeat">
-      <a:schemeClr val="lt1"/>
-    </dgm:txFillClrLst>
-    <dgm:txEffectClrLst/>
-  </dgm:styleLbl>
-  <dgm:styleLbl name="fgShp">
-    <dgm:fillClrLst meth="repeat">
-      <a:schemeClr val="accent2">
-        <a:tint val="40000"/>
-      </a:schemeClr>
-    </dgm:fillClrLst>
-    <dgm:linClrLst meth="repeat">
-      <a:schemeClr val="lt1"/>
-    </dgm:linClrLst>
-    <dgm:effectClrLst/>
-    <dgm:txLinClrLst/>
-    <dgm:txFillClrLst meth="repeat">
-      <a:schemeClr val="dk1"/>
-    </dgm:txFillClrLst>
-    <dgm:txEffectClrLst/>
-  </dgm:styleLbl>
-  <dgm:styleLbl name="revTx">
-    <dgm:fillClrLst meth="repeat">
-      <a:schemeClr val="lt1">
-        <a:alpha val="0"/>
-      </a:schemeClr>
-    </dgm:fillClrLst>
-    <dgm:linClrLst meth="repeat">
-      <a:schemeClr val="dk1">
-        <a:alpha val="0"/>
-      </a:schemeClr>
-    </dgm:linClrLst>
-    <dgm:effectClrLst/>
-    <dgm:txLinClrLst/>
-    <dgm:txFillClrLst meth="repeat">
-      <a:schemeClr val="bg1"/>
-    </dgm:txFillClrLst>
-    <dgm:txEffectClrLst/>
-  </dgm:styleLbl>
-</dgm:colorsDef>
-</file>
-
-<file path=ppt/diagrams/colors7.xml><?xml version="1.0" encoding="utf-8"?>
 <dgm:colorsDef xmlns:dgm="http://schemas.openxmlformats.org/drawingml/2006/diagram" xmlns:a="http://schemas.openxmlformats.org/drawingml/2006/main" uniqueId="urn:microsoft.com/office/officeart/2018/5/colors/Iconchunking_neutralbg_colorful1">
   <dgm:title val=""/>
   <dgm:desc val=""/>
@@ -6289,7 +5368,7 @@
 </dgm:colorsDef>
 </file>
 
-<file path=ppt/diagrams/colors8.xml><?xml version="1.0" encoding="utf-8"?>
+<file path=ppt/diagrams/colors7.xml><?xml version="1.0" encoding="utf-8"?>
 <dgm:colorsDef xmlns:dgm="http://schemas.openxmlformats.org/drawingml/2006/diagram" xmlns:a="http://schemas.openxmlformats.org/drawingml/2006/main" uniqueId="urn:microsoft.com/office/officeart/2005/8/colors/colorful1">
   <dgm:title val=""/>
   <dgm:desc val=""/>
@@ -7585,7 +6664,7 @@
           </a:r>
           <a:r>
             <a:rPr lang="en-KE" b="0" i="0" baseline="0"/>
-            <a:t> Social media posts, SMS/chat messages, online articles, transcribed speech, and public datasets.</a:t>
+            <a:t> All data was manually collected (source: manual_collection) — short text samples written or transcribed directly for this project.</a:t>
           </a:r>
           <a:endParaRPr lang="en-US"/>
         </a:p>
@@ -8446,7 +7525,7 @@
           </a:r>
           <a:r>
             <a:rPr lang="en-KE" b="0" i="0" baseline="0"/>
-            <a:t> TF-IDF (Term Frequency-Inverse Document Frequency).</a:t>
+            <a:t> TF-IDF with character n-grams: analyzer='char', ngram_range=(2,5), max_features=15000.</a:t>
           </a:r>
           <a:endParaRPr lang="en-US"/>
         </a:p>
@@ -8487,7 +7566,7 @@
           </a:r>
           <a:r>
             <a:rPr lang="en-KE" b="0" i="0" baseline="0"/>
-            <a:t> The model maps unique character n-grams or words in the text column to specific categories in the language column.</a:t>
+            <a:t> Character n-grams capture subword patterns ideal for short and code-mixed text. Text is preprocessed: lowercased, punctuation removed, and filtered to ASCII characters only before vectorization.</a:t>
           </a:r>
           <a:endParaRPr lang="en-US"/>
         </a:p>
@@ -8693,7 +7772,7 @@
           </a:r>
           <a:r>
             <a:rPr lang="en-KE" b="0" i="0" baseline="0"/>
-            <a:t> Fast and effective for small datasets and text frequencies.</a:t>
+            <a:t> MultinomialNB(alpha=0.1), wrapped in CalibratedClassifierCV (sigmoid, cv=5) for probability calibration.</a:t>
           </a:r>
           <a:endParaRPr lang="en-US"/>
         </a:p>
@@ -8734,7 +7813,7 @@
           </a:r>
           <a:r>
             <a:rPr lang="en-KE" b="0" i="0" baseline="0"/>
-            <a:t> Better at identifying relationships between different character patterns.</a:t>
+            <a:t> LogisticRegression(max_iter=2000, C=1.5, class_weight='balanced'), also wrapped in CalibratedClassifierCV for reliable confidence scores.</a:t>
           </a:r>
           <a:endParaRPr lang="en-US"/>
         </a:p>
@@ -9068,446 +8147,6 @@
 <file path=ppt/diagrams/data6.xml><?xml version="1.0" encoding="utf-8"?>
 <dgm:dataModel xmlns:dgm="http://schemas.openxmlformats.org/drawingml/2006/diagram" xmlns:a="http://schemas.openxmlformats.org/drawingml/2006/main">
   <dgm:ptLst>
-    <dgm:pt modelId="{C7E61429-CD69-424A-ADD5-6D12A4F04BBE}" type="doc">
-      <dgm:prSet loTypeId="urn:microsoft.com/office/officeart/2018/2/layout/IconVerticalSolidList" loCatId="icon" qsTypeId="urn:microsoft.com/office/officeart/2005/8/quickstyle/simple1" qsCatId="simple" csTypeId="urn:microsoft.com/office/officeart/2018/5/colors/Iconchunking_neutralicontext_colorful1" csCatId="colorful" phldr="1"/>
-      <dgm:spPr/>
-      <dgm:t>
-        <a:bodyPr/>
-        <a:lstStyle/>
-        <a:p>
-          <a:endParaRPr lang="en-US"/>
-        </a:p>
-      </dgm:t>
-    </dgm:pt>
-    <dgm:pt modelId="{59D7326E-84F5-4CE7-85B9-33D4D6A8DBAE}">
-      <dgm:prSet/>
-      <dgm:spPr/>
-      <dgm:t>
-        <a:bodyPr/>
-        <a:lstStyle/>
-        <a:p>
-          <a:r>
-            <a:rPr lang="en-KE" b="1" i="0" baseline="0"/>
-            <a:t>Accuracy:</a:t>
-          </a:r>
-          <a:r>
-            <a:rPr lang="en-KE" b="0" i="0" baseline="0"/>
-            <a:t> Overall measure of correct predictions.</a:t>
-          </a:r>
-          <a:endParaRPr lang="en-US"/>
-        </a:p>
-      </dgm:t>
-    </dgm:pt>
-    <dgm:pt modelId="{8A1CB909-49AF-486D-BC8A-5E789FAADBB3}" type="parTrans" cxnId="{9F91A6AD-C749-4D78-86D9-F257C66BD569}">
-      <dgm:prSet/>
-      <dgm:spPr/>
-      <dgm:t>
-        <a:bodyPr/>
-        <a:lstStyle/>
-        <a:p>
-          <a:endParaRPr lang="en-US"/>
-        </a:p>
-      </dgm:t>
-    </dgm:pt>
-    <dgm:pt modelId="{68C4460F-45CA-45E0-BDFC-F61E03C875B7}" type="sibTrans" cxnId="{9F91A6AD-C749-4D78-86D9-F257C66BD569}">
-      <dgm:prSet/>
-      <dgm:spPr/>
-      <dgm:t>
-        <a:bodyPr/>
-        <a:lstStyle/>
-        <a:p>
-          <a:endParaRPr lang="en-US"/>
-        </a:p>
-      </dgm:t>
-    </dgm:pt>
-    <dgm:pt modelId="{FDE9D7D8-EC89-4A3C-A31C-7FF5D50C8048}">
-      <dgm:prSet/>
-      <dgm:spPr/>
-      <dgm:t>
-        <a:bodyPr/>
-        <a:lstStyle/>
-        <a:p>
-          <a:r>
-            <a:rPr lang="en-KE" b="1" i="0" baseline="0"/>
-            <a:t>Precision &amp; Recall:</a:t>
-          </a:r>
-          <a:r>
-            <a:rPr lang="en-KE" b="0" i="0" baseline="0"/>
-            <a:t> Measure the accuracy of positive predictions and the ability to find all relevant cases.</a:t>
-          </a:r>
-          <a:endParaRPr lang="en-US"/>
-        </a:p>
-      </dgm:t>
-    </dgm:pt>
-    <dgm:pt modelId="{5AC61945-3AA9-4E89-A0E4-BFB6F282DCF6}" type="parTrans" cxnId="{FC28669B-7F80-4923-943B-A18D98D79040}">
-      <dgm:prSet/>
-      <dgm:spPr/>
-      <dgm:t>
-        <a:bodyPr/>
-        <a:lstStyle/>
-        <a:p>
-          <a:endParaRPr lang="en-US"/>
-        </a:p>
-      </dgm:t>
-    </dgm:pt>
-    <dgm:pt modelId="{CD84DE3C-C4BF-4F48-8DE1-D73AF7033FE5}" type="sibTrans" cxnId="{FC28669B-7F80-4923-943B-A18D98D79040}">
-      <dgm:prSet/>
-      <dgm:spPr/>
-      <dgm:t>
-        <a:bodyPr/>
-        <a:lstStyle/>
-        <a:p>
-          <a:endParaRPr lang="en-US"/>
-        </a:p>
-      </dgm:t>
-    </dgm:pt>
-    <dgm:pt modelId="{2D1A5CC7-66B7-40CB-86EA-9CBFC5CF91DC}">
-      <dgm:prSet/>
-      <dgm:spPr/>
-      <dgm:t>
-        <a:bodyPr/>
-        <a:lstStyle/>
-        <a:p>
-          <a:r>
-            <a:rPr lang="en-KE" b="1" i="0" baseline="0"/>
-            <a:t>F1-Score:</a:t>
-          </a:r>
-          <a:r>
-            <a:rPr lang="en-KE" b="0" i="0" baseline="0"/>
-            <a:t> The harmonic mean of precision and recall.</a:t>
-          </a:r>
-          <a:endParaRPr lang="en-US"/>
-        </a:p>
-      </dgm:t>
-    </dgm:pt>
-    <dgm:pt modelId="{53E1FC40-585A-448D-BBF6-E0C043CA15C6}" type="parTrans" cxnId="{25CE137D-7EC2-4246-B3A9-F3F1B3123E2C}">
-      <dgm:prSet/>
-      <dgm:spPr/>
-      <dgm:t>
-        <a:bodyPr/>
-        <a:lstStyle/>
-        <a:p>
-          <a:endParaRPr lang="en-US"/>
-        </a:p>
-      </dgm:t>
-    </dgm:pt>
-    <dgm:pt modelId="{1846B1F5-C7E2-4FA4-833B-362214F53F40}" type="sibTrans" cxnId="{25CE137D-7EC2-4246-B3A9-F3F1B3123E2C}">
-      <dgm:prSet/>
-      <dgm:spPr/>
-      <dgm:t>
-        <a:bodyPr/>
-        <a:lstStyle/>
-        <a:p>
-          <a:endParaRPr lang="en-US"/>
-        </a:p>
-      </dgm:t>
-    </dgm:pt>
-    <dgm:pt modelId="{ACD2ABEA-8B8A-4CBC-8CE9-1591B2E1C946}">
-      <dgm:prSet/>
-      <dgm:spPr/>
-      <dgm:t>
-        <a:bodyPr/>
-        <a:lstStyle/>
-        <a:p>
-          <a:r>
-            <a:rPr lang="en-KE" b="1" i="0" baseline="0"/>
-            <a:t>Confusion Matrix:</a:t>
-          </a:r>
-          <a:r>
-            <a:rPr lang="en-KE" b="0" i="0" baseline="0"/>
-            <a:t> Identifies how often the model confuses one language with another.</a:t>
-          </a:r>
-          <a:endParaRPr lang="en-US"/>
-        </a:p>
-      </dgm:t>
-    </dgm:pt>
-    <dgm:pt modelId="{3D5232A5-8FF2-410C-9817-358BFA772218}" type="parTrans" cxnId="{37936EAE-6C9F-4EF5-BA23-667883071117}">
-      <dgm:prSet/>
-      <dgm:spPr/>
-      <dgm:t>
-        <a:bodyPr/>
-        <a:lstStyle/>
-        <a:p>
-          <a:endParaRPr lang="en-US"/>
-        </a:p>
-      </dgm:t>
-    </dgm:pt>
-    <dgm:pt modelId="{65D7FE30-8242-4D03-849C-86088BF0B943}" type="sibTrans" cxnId="{37936EAE-6C9F-4EF5-BA23-667883071117}">
-      <dgm:prSet/>
-      <dgm:spPr/>
-      <dgm:t>
-        <a:bodyPr/>
-        <a:lstStyle/>
-        <a:p>
-          <a:endParaRPr lang="en-US"/>
-        </a:p>
-      </dgm:t>
-    </dgm:pt>
-    <dgm:pt modelId="{54AC3E55-F0A3-4595-BB5F-1E92B6BBDAD8}" type="pres">
-      <dgm:prSet presAssocID="{C7E61429-CD69-424A-ADD5-6D12A4F04BBE}" presName="root" presStyleCnt="0">
-        <dgm:presLayoutVars>
-          <dgm:dir/>
-          <dgm:resizeHandles val="exact"/>
-        </dgm:presLayoutVars>
-      </dgm:prSet>
-      <dgm:spPr/>
-    </dgm:pt>
-    <dgm:pt modelId="{3EF19570-D90D-4D00-B664-82510F470F30}" type="pres">
-      <dgm:prSet presAssocID="{59D7326E-84F5-4CE7-85B9-33D4D6A8DBAE}" presName="compNode" presStyleCnt="0"/>
-      <dgm:spPr/>
-    </dgm:pt>
-    <dgm:pt modelId="{3FB796B3-0969-4259-92CA-6A07BC5BA453}" type="pres">
-      <dgm:prSet presAssocID="{59D7326E-84F5-4CE7-85B9-33D4D6A8DBAE}" presName="bgRect" presStyleLbl="bgShp" presStyleIdx="0" presStyleCnt="4"/>
-      <dgm:spPr/>
-    </dgm:pt>
-    <dgm:pt modelId="{5EA16962-2E07-4F4D-B70C-C65CF9B5019D}" type="pres">
-      <dgm:prSet presAssocID="{59D7326E-84F5-4CE7-85B9-33D4D6A8DBAE}" presName="iconRect" presStyleLbl="node1" presStyleIdx="0" presStyleCnt="4"/>
-      <dgm:spPr>
-        <a:blipFill>
-          <a:blip xmlns:r="http://schemas.openxmlformats.org/officeDocument/2006/relationships">
-            <a:extLst>
-              <a:ext uri="{28A0092B-C50C-407E-A947-70E740481C1C}">
-                <a14:useLocalDpi xmlns:a14="http://schemas.microsoft.com/office/drawing/2010/main" val="0"/>
-              </a:ext>
-              <a:ext uri="{96DAC541-7B7A-43D3-8B79-37D633B846F1}">
-                <asvg:svgBlip xmlns:asvg="http://schemas.microsoft.com/office/drawing/2016/SVG/main" r:embed="rId1"/>
-              </a:ext>
-            </a:extLst>
-          </a:blip>
-          <a:stretch>
-            <a:fillRect/>
-          </a:stretch>
-        </a:blipFill>
-        <a:ln>
-          <a:noFill/>
-        </a:ln>
-      </dgm:spPr>
-      <dgm:extLst>
-        <a:ext uri="{E40237B7-FDA0-4F09-8148-C483321AD2D9}">
-          <dgm14:cNvPr xmlns:dgm14="http://schemas.microsoft.com/office/drawing/2010/diagram" id="0" name="" descr="Target"/>
-        </a:ext>
-      </dgm:extLst>
-    </dgm:pt>
-    <dgm:pt modelId="{95789D5E-CEA1-4987-BDB5-07C7E8E7C7A1}" type="pres">
-      <dgm:prSet presAssocID="{59D7326E-84F5-4CE7-85B9-33D4D6A8DBAE}" presName="spaceRect" presStyleCnt="0"/>
-      <dgm:spPr/>
-    </dgm:pt>
-    <dgm:pt modelId="{2B11A0BE-235E-4575-A2BD-10FFF17D9371}" type="pres">
-      <dgm:prSet presAssocID="{59D7326E-84F5-4CE7-85B9-33D4D6A8DBAE}" presName="parTx" presStyleLbl="revTx" presStyleIdx="0" presStyleCnt="4">
-        <dgm:presLayoutVars>
-          <dgm:chMax val="0"/>
-          <dgm:chPref val="0"/>
-        </dgm:presLayoutVars>
-      </dgm:prSet>
-      <dgm:spPr/>
-    </dgm:pt>
-    <dgm:pt modelId="{DD1D4D68-7D1A-43A6-B3EC-8A4CB09E1FED}" type="pres">
-      <dgm:prSet presAssocID="{68C4460F-45CA-45E0-BDFC-F61E03C875B7}" presName="sibTrans" presStyleCnt="0"/>
-      <dgm:spPr/>
-    </dgm:pt>
-    <dgm:pt modelId="{22ACA2B8-1642-45C3-942E-AE20D8137E02}" type="pres">
-      <dgm:prSet presAssocID="{FDE9D7D8-EC89-4A3C-A31C-7FF5D50C8048}" presName="compNode" presStyleCnt="0"/>
-      <dgm:spPr/>
-    </dgm:pt>
-    <dgm:pt modelId="{55864032-D135-475D-BADD-A7A018E9EE11}" type="pres">
-      <dgm:prSet presAssocID="{FDE9D7D8-EC89-4A3C-A31C-7FF5D50C8048}" presName="bgRect" presStyleLbl="bgShp" presStyleIdx="1" presStyleCnt="4"/>
-      <dgm:spPr/>
-    </dgm:pt>
-    <dgm:pt modelId="{2EA6AC5D-C203-42E0-AE3D-74A6204F28DB}" type="pres">
-      <dgm:prSet presAssocID="{FDE9D7D8-EC89-4A3C-A31C-7FF5D50C8048}" presName="iconRect" presStyleLbl="node1" presStyleIdx="1" presStyleCnt="4"/>
-      <dgm:spPr>
-        <a:blipFill>
-          <a:blip xmlns:r="http://schemas.openxmlformats.org/officeDocument/2006/relationships">
-            <a:extLst>
-              <a:ext uri="{28A0092B-C50C-407E-A947-70E740481C1C}">
-                <a14:useLocalDpi xmlns:a14="http://schemas.microsoft.com/office/drawing/2010/main" val="0"/>
-              </a:ext>
-              <a:ext uri="{96DAC541-7B7A-43D3-8B79-37D633B846F1}">
-                <asvg:svgBlip xmlns:asvg="http://schemas.microsoft.com/office/drawing/2016/SVG/main" r:embed="rId2"/>
-              </a:ext>
-            </a:extLst>
-          </a:blip>
-          <a:stretch>
-            <a:fillRect/>
-          </a:stretch>
-        </a:blipFill>
-        <a:ln>
-          <a:noFill/>
-        </a:ln>
-      </dgm:spPr>
-      <dgm:extLst>
-        <a:ext uri="{E40237B7-FDA0-4F09-8148-C483321AD2D9}">
-          <dgm14:cNvPr xmlns:dgm14="http://schemas.microsoft.com/office/drawing/2010/diagram" id="0" name="" descr="Bullseye"/>
-        </a:ext>
-      </dgm:extLst>
-    </dgm:pt>
-    <dgm:pt modelId="{E36042E3-C861-45EA-B0F3-B1585AC789E3}" type="pres">
-      <dgm:prSet presAssocID="{FDE9D7D8-EC89-4A3C-A31C-7FF5D50C8048}" presName="spaceRect" presStyleCnt="0"/>
-      <dgm:spPr/>
-    </dgm:pt>
-    <dgm:pt modelId="{3BF8863F-FA5B-42F4-AB8C-5CC727885905}" type="pres">
-      <dgm:prSet presAssocID="{FDE9D7D8-EC89-4A3C-A31C-7FF5D50C8048}" presName="parTx" presStyleLbl="revTx" presStyleIdx="1" presStyleCnt="4">
-        <dgm:presLayoutVars>
-          <dgm:chMax val="0"/>
-          <dgm:chPref val="0"/>
-        </dgm:presLayoutVars>
-      </dgm:prSet>
-      <dgm:spPr/>
-    </dgm:pt>
-    <dgm:pt modelId="{282C4ECB-756A-4D96-89EB-27B7A7BA9DB6}" type="pres">
-      <dgm:prSet presAssocID="{CD84DE3C-C4BF-4F48-8DE1-D73AF7033FE5}" presName="sibTrans" presStyleCnt="0"/>
-      <dgm:spPr/>
-    </dgm:pt>
-    <dgm:pt modelId="{4B9647C2-84F6-452F-BE47-74CA6544F848}" type="pres">
-      <dgm:prSet presAssocID="{2D1A5CC7-66B7-40CB-86EA-9CBFC5CF91DC}" presName="compNode" presStyleCnt="0"/>
-      <dgm:spPr/>
-    </dgm:pt>
-    <dgm:pt modelId="{B80B12C7-4B31-4128-A745-CB8FA28653CA}" type="pres">
-      <dgm:prSet presAssocID="{2D1A5CC7-66B7-40CB-86EA-9CBFC5CF91DC}" presName="bgRect" presStyleLbl="bgShp" presStyleIdx="2" presStyleCnt="4"/>
-      <dgm:spPr/>
-    </dgm:pt>
-    <dgm:pt modelId="{14562713-5449-48C0-A8D3-CEB9866F8076}" type="pres">
-      <dgm:prSet presAssocID="{2D1A5CC7-66B7-40CB-86EA-9CBFC5CF91DC}" presName="iconRect" presStyleLbl="node1" presStyleIdx="2" presStyleCnt="4"/>
-      <dgm:spPr>
-        <a:blipFill>
-          <a:blip xmlns:r="http://schemas.openxmlformats.org/officeDocument/2006/relationships">
-            <a:extLst>
-              <a:ext uri="{28A0092B-C50C-407E-A947-70E740481C1C}">
-                <a14:useLocalDpi xmlns:a14="http://schemas.microsoft.com/office/drawing/2010/main" val="0"/>
-              </a:ext>
-              <a:ext uri="{96DAC541-7B7A-43D3-8B79-37D633B846F1}">
-                <asvg:svgBlip xmlns:asvg="http://schemas.microsoft.com/office/drawing/2016/SVG/main" r:embed="rId3"/>
-              </a:ext>
-            </a:extLst>
-          </a:blip>
-          <a:stretch>
-            <a:fillRect/>
-          </a:stretch>
-        </a:blipFill>
-        <a:ln>
-          <a:noFill/>
-        </a:ln>
-      </dgm:spPr>
-      <dgm:extLst>
-        <a:ext uri="{E40237B7-FDA0-4F09-8148-C483321AD2D9}">
-          <dgm14:cNvPr xmlns:dgm14="http://schemas.microsoft.com/office/drawing/2010/diagram" id="0" name="" descr="Mathematics"/>
-        </a:ext>
-      </dgm:extLst>
-    </dgm:pt>
-    <dgm:pt modelId="{473101FA-D32D-4C72-9185-21042359CDAB}" type="pres">
-      <dgm:prSet presAssocID="{2D1A5CC7-66B7-40CB-86EA-9CBFC5CF91DC}" presName="spaceRect" presStyleCnt="0"/>
-      <dgm:spPr/>
-    </dgm:pt>
-    <dgm:pt modelId="{4365C124-CC5E-48B7-B456-210099A3F1FF}" type="pres">
-      <dgm:prSet presAssocID="{2D1A5CC7-66B7-40CB-86EA-9CBFC5CF91DC}" presName="parTx" presStyleLbl="revTx" presStyleIdx="2" presStyleCnt="4">
-        <dgm:presLayoutVars>
-          <dgm:chMax val="0"/>
-          <dgm:chPref val="0"/>
-        </dgm:presLayoutVars>
-      </dgm:prSet>
-      <dgm:spPr/>
-    </dgm:pt>
-    <dgm:pt modelId="{E1226149-B413-441F-8809-CF4FCC73956E}" type="pres">
-      <dgm:prSet presAssocID="{1846B1F5-C7E2-4FA4-833B-362214F53F40}" presName="sibTrans" presStyleCnt="0"/>
-      <dgm:spPr/>
-    </dgm:pt>
-    <dgm:pt modelId="{33088FB4-84E8-49D8-8118-E0CE4E1C62CF}" type="pres">
-      <dgm:prSet presAssocID="{ACD2ABEA-8B8A-4CBC-8CE9-1591B2E1C946}" presName="compNode" presStyleCnt="0"/>
-      <dgm:spPr/>
-    </dgm:pt>
-    <dgm:pt modelId="{6523A919-8772-4CF4-9AE8-5C3E930DB19F}" type="pres">
-      <dgm:prSet presAssocID="{ACD2ABEA-8B8A-4CBC-8CE9-1591B2E1C946}" presName="bgRect" presStyleLbl="bgShp" presStyleIdx="3" presStyleCnt="4"/>
-      <dgm:spPr/>
-    </dgm:pt>
-    <dgm:pt modelId="{D7F21D8C-0B10-44F0-9666-56324AD98F49}" type="pres">
-      <dgm:prSet presAssocID="{ACD2ABEA-8B8A-4CBC-8CE9-1591B2E1C946}" presName="iconRect" presStyleLbl="node1" presStyleIdx="3" presStyleCnt="4"/>
-      <dgm:spPr>
-        <a:blipFill>
-          <a:blip xmlns:r="http://schemas.openxmlformats.org/officeDocument/2006/relationships">
-            <a:extLst>
-              <a:ext uri="{28A0092B-C50C-407E-A947-70E740481C1C}">
-                <a14:useLocalDpi xmlns:a14="http://schemas.microsoft.com/office/drawing/2010/main" val="0"/>
-              </a:ext>
-              <a:ext uri="{96DAC541-7B7A-43D3-8B79-37D633B846F1}">
-                <asvg:svgBlip xmlns:asvg="http://schemas.microsoft.com/office/drawing/2016/SVG/main" r:embed="rId4"/>
-              </a:ext>
-            </a:extLst>
-          </a:blip>
-          <a:stretch>
-            <a:fillRect/>
-          </a:stretch>
-        </a:blipFill>
-        <a:ln>
-          <a:noFill/>
-        </a:ln>
-      </dgm:spPr>
-      <dgm:extLst>
-        <a:ext uri="{E40237B7-FDA0-4F09-8148-C483321AD2D9}">
-          <dgm14:cNvPr xmlns:dgm14="http://schemas.microsoft.com/office/drawing/2010/diagram" id="0" name="" descr="Flowchart"/>
-        </a:ext>
-      </dgm:extLst>
-    </dgm:pt>
-    <dgm:pt modelId="{76F631B4-8909-4DB1-A91B-C5DF2837B03B}" type="pres">
-      <dgm:prSet presAssocID="{ACD2ABEA-8B8A-4CBC-8CE9-1591B2E1C946}" presName="spaceRect" presStyleCnt="0"/>
-      <dgm:spPr/>
-    </dgm:pt>
-    <dgm:pt modelId="{6FBE637C-FB7C-4C9F-BD88-B23129DA6949}" type="pres">
-      <dgm:prSet presAssocID="{ACD2ABEA-8B8A-4CBC-8CE9-1591B2E1C946}" presName="parTx" presStyleLbl="revTx" presStyleIdx="3" presStyleCnt="4">
-        <dgm:presLayoutVars>
-          <dgm:chMax val="0"/>
-          <dgm:chPref val="0"/>
-        </dgm:presLayoutVars>
-      </dgm:prSet>
-      <dgm:spPr/>
-    </dgm:pt>
-  </dgm:ptLst>
-  <dgm:cxnLst>
-    <dgm:cxn modelId="{A2E82829-E60A-4BBB-A835-EC61D84CBD66}" type="presOf" srcId="{FDE9D7D8-EC89-4A3C-A31C-7FF5D50C8048}" destId="{3BF8863F-FA5B-42F4-AB8C-5CC727885905}" srcOrd="0" destOrd="0" presId="urn:microsoft.com/office/officeart/2018/2/layout/IconVerticalSolidList"/>
-    <dgm:cxn modelId="{7664415C-641E-4701-8F5C-C00F90717FE8}" type="presOf" srcId="{59D7326E-84F5-4CE7-85B9-33D4D6A8DBAE}" destId="{2B11A0BE-235E-4575-A2BD-10FFF17D9371}" srcOrd="0" destOrd="0" presId="urn:microsoft.com/office/officeart/2018/2/layout/IconVerticalSolidList"/>
-    <dgm:cxn modelId="{357F836F-A9BF-4FCE-9A42-783BA686C9F2}" type="presOf" srcId="{C7E61429-CD69-424A-ADD5-6D12A4F04BBE}" destId="{54AC3E55-F0A3-4595-BB5F-1E92B6BBDAD8}" srcOrd="0" destOrd="0" presId="urn:microsoft.com/office/officeart/2018/2/layout/IconVerticalSolidList"/>
-    <dgm:cxn modelId="{25CE137D-7EC2-4246-B3A9-F3F1B3123E2C}" srcId="{C7E61429-CD69-424A-ADD5-6D12A4F04BBE}" destId="{2D1A5CC7-66B7-40CB-86EA-9CBFC5CF91DC}" srcOrd="2" destOrd="0" parTransId="{53E1FC40-585A-448D-BBF6-E0C043CA15C6}" sibTransId="{1846B1F5-C7E2-4FA4-833B-362214F53F40}"/>
-    <dgm:cxn modelId="{FC28669B-7F80-4923-943B-A18D98D79040}" srcId="{C7E61429-CD69-424A-ADD5-6D12A4F04BBE}" destId="{FDE9D7D8-EC89-4A3C-A31C-7FF5D50C8048}" srcOrd="1" destOrd="0" parTransId="{5AC61945-3AA9-4E89-A0E4-BFB6F282DCF6}" sibTransId="{CD84DE3C-C4BF-4F48-8DE1-D73AF7033FE5}"/>
-    <dgm:cxn modelId="{9F91A6AD-C749-4D78-86D9-F257C66BD569}" srcId="{C7E61429-CD69-424A-ADD5-6D12A4F04BBE}" destId="{59D7326E-84F5-4CE7-85B9-33D4D6A8DBAE}" srcOrd="0" destOrd="0" parTransId="{8A1CB909-49AF-486D-BC8A-5E789FAADBB3}" sibTransId="{68C4460F-45CA-45E0-BDFC-F61E03C875B7}"/>
-    <dgm:cxn modelId="{37936EAE-6C9F-4EF5-BA23-667883071117}" srcId="{C7E61429-CD69-424A-ADD5-6D12A4F04BBE}" destId="{ACD2ABEA-8B8A-4CBC-8CE9-1591B2E1C946}" srcOrd="3" destOrd="0" parTransId="{3D5232A5-8FF2-410C-9817-358BFA772218}" sibTransId="{65D7FE30-8242-4D03-849C-86088BF0B943}"/>
-    <dgm:cxn modelId="{705CD7BC-915F-4D90-AF12-51DF2D683023}" type="presOf" srcId="{ACD2ABEA-8B8A-4CBC-8CE9-1591B2E1C946}" destId="{6FBE637C-FB7C-4C9F-BD88-B23129DA6949}" srcOrd="0" destOrd="0" presId="urn:microsoft.com/office/officeart/2018/2/layout/IconVerticalSolidList"/>
-    <dgm:cxn modelId="{379690E1-9843-4DA9-B37A-51498E68CFD2}" type="presOf" srcId="{2D1A5CC7-66B7-40CB-86EA-9CBFC5CF91DC}" destId="{4365C124-CC5E-48B7-B456-210099A3F1FF}" srcOrd="0" destOrd="0" presId="urn:microsoft.com/office/officeart/2018/2/layout/IconVerticalSolidList"/>
-    <dgm:cxn modelId="{14472097-B8FA-4F00-944C-A41D18E5CFA2}" type="presParOf" srcId="{54AC3E55-F0A3-4595-BB5F-1E92B6BBDAD8}" destId="{3EF19570-D90D-4D00-B664-82510F470F30}" srcOrd="0" destOrd="0" presId="urn:microsoft.com/office/officeart/2018/2/layout/IconVerticalSolidList"/>
-    <dgm:cxn modelId="{D56A7076-0C9E-488A-AE81-A3243D1B80E2}" type="presParOf" srcId="{3EF19570-D90D-4D00-B664-82510F470F30}" destId="{3FB796B3-0969-4259-92CA-6A07BC5BA453}" srcOrd="0" destOrd="0" presId="urn:microsoft.com/office/officeart/2018/2/layout/IconVerticalSolidList"/>
-    <dgm:cxn modelId="{2A325DE9-E7BA-437F-A8DE-059639A730B7}" type="presParOf" srcId="{3EF19570-D90D-4D00-B664-82510F470F30}" destId="{5EA16962-2E07-4F4D-B70C-C65CF9B5019D}" srcOrd="1" destOrd="0" presId="urn:microsoft.com/office/officeart/2018/2/layout/IconVerticalSolidList"/>
-    <dgm:cxn modelId="{1B0CAFCC-8670-4A38-AE59-EB7C8827F59D}" type="presParOf" srcId="{3EF19570-D90D-4D00-B664-82510F470F30}" destId="{95789D5E-CEA1-4987-BDB5-07C7E8E7C7A1}" srcOrd="2" destOrd="0" presId="urn:microsoft.com/office/officeart/2018/2/layout/IconVerticalSolidList"/>
-    <dgm:cxn modelId="{3FB97BAC-5A87-496A-8B8B-E5D2B29C2E13}" type="presParOf" srcId="{3EF19570-D90D-4D00-B664-82510F470F30}" destId="{2B11A0BE-235E-4575-A2BD-10FFF17D9371}" srcOrd="3" destOrd="0" presId="urn:microsoft.com/office/officeart/2018/2/layout/IconVerticalSolidList"/>
-    <dgm:cxn modelId="{B5FD09A9-8BA8-4613-970B-21037CA0FC1C}" type="presParOf" srcId="{54AC3E55-F0A3-4595-BB5F-1E92B6BBDAD8}" destId="{DD1D4D68-7D1A-43A6-B3EC-8A4CB09E1FED}" srcOrd="1" destOrd="0" presId="urn:microsoft.com/office/officeart/2018/2/layout/IconVerticalSolidList"/>
-    <dgm:cxn modelId="{8C0C3CB0-C0CD-447F-952D-692996D3982C}" type="presParOf" srcId="{54AC3E55-F0A3-4595-BB5F-1E92B6BBDAD8}" destId="{22ACA2B8-1642-45C3-942E-AE20D8137E02}" srcOrd="2" destOrd="0" presId="urn:microsoft.com/office/officeart/2018/2/layout/IconVerticalSolidList"/>
-    <dgm:cxn modelId="{2777345E-80C2-4083-AE12-71E2E17497A1}" type="presParOf" srcId="{22ACA2B8-1642-45C3-942E-AE20D8137E02}" destId="{55864032-D135-475D-BADD-A7A018E9EE11}" srcOrd="0" destOrd="0" presId="urn:microsoft.com/office/officeart/2018/2/layout/IconVerticalSolidList"/>
-    <dgm:cxn modelId="{2E7556CF-F4EA-4286-A575-1C2B957AD920}" type="presParOf" srcId="{22ACA2B8-1642-45C3-942E-AE20D8137E02}" destId="{2EA6AC5D-C203-42E0-AE3D-74A6204F28DB}" srcOrd="1" destOrd="0" presId="urn:microsoft.com/office/officeart/2018/2/layout/IconVerticalSolidList"/>
-    <dgm:cxn modelId="{BA794797-AC1C-4659-BBEA-FF5782E0A2E4}" type="presParOf" srcId="{22ACA2B8-1642-45C3-942E-AE20D8137E02}" destId="{E36042E3-C861-45EA-B0F3-B1585AC789E3}" srcOrd="2" destOrd="0" presId="urn:microsoft.com/office/officeart/2018/2/layout/IconVerticalSolidList"/>
-    <dgm:cxn modelId="{177118C5-993F-403F-B33A-D9CA6D5F1591}" type="presParOf" srcId="{22ACA2B8-1642-45C3-942E-AE20D8137E02}" destId="{3BF8863F-FA5B-42F4-AB8C-5CC727885905}" srcOrd="3" destOrd="0" presId="urn:microsoft.com/office/officeart/2018/2/layout/IconVerticalSolidList"/>
-    <dgm:cxn modelId="{7AD2BCDB-E940-4B92-8DC2-074586452F1C}" type="presParOf" srcId="{54AC3E55-F0A3-4595-BB5F-1E92B6BBDAD8}" destId="{282C4ECB-756A-4D96-89EB-27B7A7BA9DB6}" srcOrd="3" destOrd="0" presId="urn:microsoft.com/office/officeart/2018/2/layout/IconVerticalSolidList"/>
-    <dgm:cxn modelId="{603F87C3-C9C5-49B1-B845-DBE147B40929}" type="presParOf" srcId="{54AC3E55-F0A3-4595-BB5F-1E92B6BBDAD8}" destId="{4B9647C2-84F6-452F-BE47-74CA6544F848}" srcOrd="4" destOrd="0" presId="urn:microsoft.com/office/officeart/2018/2/layout/IconVerticalSolidList"/>
-    <dgm:cxn modelId="{65C43B3A-497E-43A2-B4C9-1286074C0C0E}" type="presParOf" srcId="{4B9647C2-84F6-452F-BE47-74CA6544F848}" destId="{B80B12C7-4B31-4128-A745-CB8FA28653CA}" srcOrd="0" destOrd="0" presId="urn:microsoft.com/office/officeart/2018/2/layout/IconVerticalSolidList"/>
-    <dgm:cxn modelId="{E00C39A7-C252-4817-9C05-914094B08790}" type="presParOf" srcId="{4B9647C2-84F6-452F-BE47-74CA6544F848}" destId="{14562713-5449-48C0-A8D3-CEB9866F8076}" srcOrd="1" destOrd="0" presId="urn:microsoft.com/office/officeart/2018/2/layout/IconVerticalSolidList"/>
-    <dgm:cxn modelId="{BD12B208-EDAE-44E7-A953-3A2529759256}" type="presParOf" srcId="{4B9647C2-84F6-452F-BE47-74CA6544F848}" destId="{473101FA-D32D-4C72-9185-21042359CDAB}" srcOrd="2" destOrd="0" presId="urn:microsoft.com/office/officeart/2018/2/layout/IconVerticalSolidList"/>
-    <dgm:cxn modelId="{B6D5902A-272E-4CBA-BD2F-BF551FAF3A66}" type="presParOf" srcId="{4B9647C2-84F6-452F-BE47-74CA6544F848}" destId="{4365C124-CC5E-48B7-B456-210099A3F1FF}" srcOrd="3" destOrd="0" presId="urn:microsoft.com/office/officeart/2018/2/layout/IconVerticalSolidList"/>
-    <dgm:cxn modelId="{71205E5E-CFE7-48C9-8BBC-75D4A2437352}" type="presParOf" srcId="{54AC3E55-F0A3-4595-BB5F-1E92B6BBDAD8}" destId="{E1226149-B413-441F-8809-CF4FCC73956E}" srcOrd="5" destOrd="0" presId="urn:microsoft.com/office/officeart/2018/2/layout/IconVerticalSolidList"/>
-    <dgm:cxn modelId="{3E5A7D5F-65A2-4027-ABD3-9BE0CE4A3F02}" type="presParOf" srcId="{54AC3E55-F0A3-4595-BB5F-1E92B6BBDAD8}" destId="{33088FB4-84E8-49D8-8118-E0CE4E1C62CF}" srcOrd="6" destOrd="0" presId="urn:microsoft.com/office/officeart/2018/2/layout/IconVerticalSolidList"/>
-    <dgm:cxn modelId="{0133ED03-635C-4B82-9D03-67E87663AA0F}" type="presParOf" srcId="{33088FB4-84E8-49D8-8118-E0CE4E1C62CF}" destId="{6523A919-8772-4CF4-9AE8-5C3E930DB19F}" srcOrd="0" destOrd="0" presId="urn:microsoft.com/office/officeart/2018/2/layout/IconVerticalSolidList"/>
-    <dgm:cxn modelId="{29CB27F3-A02E-4769-8B83-18D99BA7A182}" type="presParOf" srcId="{33088FB4-84E8-49D8-8118-E0CE4E1C62CF}" destId="{D7F21D8C-0B10-44F0-9666-56324AD98F49}" srcOrd="1" destOrd="0" presId="urn:microsoft.com/office/officeart/2018/2/layout/IconVerticalSolidList"/>
-    <dgm:cxn modelId="{798CA910-562C-4771-84D0-4B3CC617DD85}" type="presParOf" srcId="{33088FB4-84E8-49D8-8118-E0CE4E1C62CF}" destId="{76F631B4-8909-4DB1-A91B-C5DF2837B03B}" srcOrd="2" destOrd="0" presId="urn:microsoft.com/office/officeart/2018/2/layout/IconVerticalSolidList"/>
-    <dgm:cxn modelId="{1809F8E1-EC36-45A8-9278-DB9E5BA91699}" type="presParOf" srcId="{33088FB4-84E8-49D8-8118-E0CE4E1C62CF}" destId="{6FBE637C-FB7C-4C9F-BD88-B23129DA6949}" srcOrd="3" destOrd="0" presId="urn:microsoft.com/office/officeart/2018/2/layout/IconVerticalSolidList"/>
-  </dgm:cxnLst>
-  <dgm:bg/>
-  <dgm:whole/>
-  <dgm:extLst>
-    <a:ext uri="http://schemas.microsoft.com/office/drawing/2008/diagram">
-      <dsp:dataModelExt xmlns:dsp="http://schemas.microsoft.com/office/drawing/2008/diagram" relId="rId6" minVer="http://schemas.openxmlformats.org/drawingml/2006/diagram"/>
-    </a:ext>
-  </dgm:extLst>
-</dgm:dataModel>
-</file>
-
-<file path=ppt/diagrams/data7.xml><?xml version="1.0" encoding="utf-8"?>
-<dgm:dataModel xmlns:dgm="http://schemas.openxmlformats.org/drawingml/2006/diagram" xmlns:a="http://schemas.openxmlformats.org/drawingml/2006/main">
-  <dgm:ptLst>
     <dgm:pt modelId="{EFE529C0-7AEE-4524-92B7-C883B711B335}" type="doc">
       <dgm:prSet loTypeId="urn:microsoft.com/office/officeart/2018/2/layout/IconLabelList" loCatId="icon" qsTypeId="urn:microsoft.com/office/officeart/2005/8/quickstyle/simple1" qsCatId="simple" csTypeId="urn:microsoft.com/office/officeart/2018/5/colors/Iconchunking_neutralbg_colorful1" csCatId="colorful" phldr="1"/>
       <dgm:spPr/>
@@ -9622,7 +8261,7 @@
           </a:r>
           <a:r>
             <a:rPr lang="en-KE" b="0" i="0" baseline="0"/>
-            <a:t> Powered by nltk, langdetect, and googletrans</a:t>
+            <a:t> scikit-learn (TfidfVectorizer, MultinomialNB, LogisticRegression, VotingClassifier, CalibratedClassifierCV), streamlit, matplotlib, pandas, numpy, re, os, zipfile, string, random, datetime.</a:t>
           </a:r>
           <a:endParaRPr lang="en-US"/>
         </a:p>
@@ -9836,7 +8475,7 @@
 </dgm:dataModel>
 </file>
 
-<file path=ppt/diagrams/data8.xml><?xml version="1.0" encoding="utf-8"?>
+<file path=ppt/diagrams/data7.xml><?xml version="1.0" encoding="utf-8"?>
 <dgm:dataModel xmlns:dgm="http://schemas.openxmlformats.org/drawingml/2006/diagram" xmlns:a="http://schemas.openxmlformats.org/drawingml/2006/main">
   <dgm:ptLst>
     <dgm:pt modelId="{82E5224B-634D-413D-896B-5B016F5193FD}" type="doc">
@@ -9951,7 +8590,7 @@
           </a:r>
           <a:r>
             <a:rPr lang="en-KE" b="0" i="0" baseline="0"/>
-            <a:t> Pandas 2.3.3 and NumPy 2.4.2.</a:t>
+            <a:t> Pandas and NumPy (versions not pinned in requirements.txt).</a:t>
           </a:r>
           <a:endParaRPr lang="en-US"/>
         </a:p>
@@ -10757,7 +9396,7 @@
           </a:r>
           <a:r>
             <a:rPr lang="en-KE" sz="1100" b="0" i="0" kern="1200" baseline="0"/>
-            <a:t> Social media posts, SMS/chat messages, online articles, transcribed speech, and public datasets.</a:t>
+            <a:t> All data was manually collected (source: manual_collection) — short text samples written or transcribed directly for this project.</a:t>
           </a:r>
           <a:endParaRPr lang="en-US" sz="1100" kern="1200"/>
         </a:p>
@@ -11952,8 +10591,8 @@
       </dsp:nvSpPr>
       <dsp:spPr>
         <a:xfrm>
-          <a:off x="0" y="359439"/>
-          <a:ext cx="6620255" cy="1367437"/>
+          <a:off x="0" y="202753"/>
+          <a:ext cx="6620255" cy="1479574"/>
         </a:xfrm>
         <a:prstGeom prst="roundRect">
           <a:avLst/>
@@ -11995,12 +10634,12 @@
         </a:fontRef>
       </dsp:style>
       <dsp:txBody>
-        <a:bodyPr spcFirstLastPara="0" vert="horz" wrap="square" lIns="95250" tIns="95250" rIns="95250" bIns="95250" numCol="1" spcCol="1270" anchor="ctr" anchorCtr="0">
+        <a:bodyPr spcFirstLastPara="0" vert="horz" wrap="square" lIns="80010" tIns="80010" rIns="80010" bIns="80010" numCol="1" spcCol="1270" anchor="ctr" anchorCtr="0">
           <a:noAutofit/>
         </a:bodyPr>
         <a:lstStyle/>
         <a:p>
-          <a:pPr marL="0" lvl="0" indent="0" algn="l" defTabSz="1111250">
+          <a:pPr marL="0" lvl="0" indent="0" algn="l" defTabSz="933450">
             <a:lnSpc>
               <a:spcPct val="90000"/>
             </a:lnSpc>
@@ -12013,19 +10652,19 @@
             <a:buNone/>
           </a:pPr>
           <a:r>
-            <a:rPr lang="en-KE" sz="2500" b="1" i="0" kern="1200" baseline="0"/>
+            <a:rPr lang="en-KE" sz="2100" b="1" i="0" kern="1200" baseline="0"/>
             <a:t>Method:</a:t>
           </a:r>
           <a:r>
-            <a:rPr lang="en-KE" sz="2500" b="0" i="0" kern="1200" baseline="0"/>
-            <a:t> TF-IDF (Term Frequency-Inverse Document Frequency).</a:t>
+            <a:rPr lang="en-KE" sz="2100" b="0" i="0" kern="1200" baseline="0"/>
+            <a:t> TF-IDF with character n-grams: analyzer='char', ngram_range=(2,5), max_features=15000.</a:t>
           </a:r>
-          <a:endParaRPr lang="en-US" sz="2500" kern="1200"/>
+          <a:endParaRPr lang="en-US" sz="2100" kern="1200"/>
         </a:p>
       </dsp:txBody>
       <dsp:txXfrm>
-        <a:off x="66753" y="426192"/>
-        <a:ext cx="6486749" cy="1233931"/>
+        <a:off x="72227" y="274980"/>
+        <a:ext cx="6475801" cy="1335120"/>
       </dsp:txXfrm>
     </dsp:sp>
     <dsp:sp modelId="{A8740695-BFE6-4F19-9EDB-FE52E9A64C70}">
@@ -12035,8 +10674,8 @@
       </dsp:nvSpPr>
       <dsp:spPr>
         <a:xfrm>
-          <a:off x="0" y="1798877"/>
-          <a:ext cx="6620255" cy="1367437"/>
+          <a:off x="0" y="1742808"/>
+          <a:ext cx="6620255" cy="1479574"/>
         </a:xfrm>
         <a:prstGeom prst="roundRect">
           <a:avLst/>
@@ -12078,12 +10717,12 @@
         </a:fontRef>
       </dsp:style>
       <dsp:txBody>
-        <a:bodyPr spcFirstLastPara="0" vert="horz" wrap="square" lIns="95250" tIns="95250" rIns="95250" bIns="95250" numCol="1" spcCol="1270" anchor="ctr" anchorCtr="0">
+        <a:bodyPr spcFirstLastPara="0" vert="horz" wrap="square" lIns="80010" tIns="80010" rIns="80010" bIns="80010" numCol="1" spcCol="1270" anchor="ctr" anchorCtr="0">
           <a:noAutofit/>
         </a:bodyPr>
         <a:lstStyle/>
         <a:p>
-          <a:pPr marL="0" lvl="0" indent="0" algn="l" defTabSz="1111250">
+          <a:pPr marL="0" lvl="0" indent="0" algn="l" defTabSz="933450">
             <a:lnSpc>
               <a:spcPct val="90000"/>
             </a:lnSpc>
@@ -12096,19 +10735,19 @@
             <a:buNone/>
           </a:pPr>
           <a:r>
-            <a:rPr lang="en-KE" sz="2500" b="1" i="0" kern="1200" baseline="0"/>
+            <a:rPr lang="en-KE" sz="2100" b="1" i="0" kern="1200" baseline="0"/>
             <a:t>Purpose:</a:t>
           </a:r>
           <a:r>
-            <a:rPr lang="en-KE" sz="2500" b="0" i="0" kern="1200" baseline="0"/>
-            <a:t> The model maps unique character n-grams or words in the text column to specific categories in the language column.</a:t>
+            <a:rPr lang="en-KE" sz="2100" b="0" i="0" kern="1200" baseline="0"/>
+            <a:t> Character n-grams capture subword patterns ideal for short and code-mixed text. Text is preprocessed: lowercased, punctuation removed, and filtered to ASCII characters only before vectorization.</a:t>
           </a:r>
-          <a:endParaRPr lang="en-US" sz="2500" kern="1200"/>
+          <a:endParaRPr lang="en-US" sz="2100" kern="1200"/>
         </a:p>
       </dsp:txBody>
       <dsp:txXfrm>
-        <a:off x="66753" y="1865630"/>
-        <a:ext cx="6486749" cy="1233931"/>
+        <a:off x="72227" y="1815035"/>
+        <a:ext cx="6475801" cy="1335120"/>
       </dsp:txXfrm>
     </dsp:sp>
     <dsp:sp modelId="{F1298748-62E1-4B3A-B9CB-58D54DDC1CAE}">
@@ -12118,8 +10757,8 @@
       </dsp:nvSpPr>
       <dsp:spPr>
         <a:xfrm>
-          <a:off x="0" y="3238314"/>
-          <a:ext cx="6620255" cy="1367437"/>
+          <a:off x="0" y="3282863"/>
+          <a:ext cx="6620255" cy="1479574"/>
         </a:xfrm>
         <a:prstGeom prst="roundRect">
           <a:avLst/>
@@ -12161,12 +10800,12 @@
         </a:fontRef>
       </dsp:style>
       <dsp:txBody>
-        <a:bodyPr spcFirstLastPara="0" vert="horz" wrap="square" lIns="95250" tIns="95250" rIns="95250" bIns="95250" numCol="1" spcCol="1270" anchor="ctr" anchorCtr="0">
+        <a:bodyPr spcFirstLastPara="0" vert="horz" wrap="square" lIns="80010" tIns="80010" rIns="80010" bIns="80010" numCol="1" spcCol="1270" anchor="ctr" anchorCtr="0">
           <a:noAutofit/>
         </a:bodyPr>
         <a:lstStyle/>
         <a:p>
-          <a:pPr marL="0" lvl="0" indent="0" algn="l" defTabSz="1111250">
+          <a:pPr marL="0" lvl="0" indent="0" algn="l" defTabSz="933450">
             <a:lnSpc>
               <a:spcPct val="90000"/>
             </a:lnSpc>
@@ -12179,19 +10818,19 @@
             <a:buNone/>
           </a:pPr>
           <a:r>
-            <a:rPr lang="en-KE" sz="2500" b="1" i="0" kern="1200" baseline="0"/>
+            <a:rPr lang="en-KE" sz="2100" b="1" i="0" kern="1200" baseline="0"/>
             <a:t>Library:</a:t>
           </a:r>
           <a:r>
-            <a:rPr lang="en-KE" sz="2500" b="0" i="0" kern="1200" baseline="0"/>
+            <a:rPr lang="en-KE" sz="2100" b="0" i="0" kern="1200" baseline="0"/>
             <a:t> Utilizes scikit-learn for vectorization.</a:t>
           </a:r>
-          <a:endParaRPr lang="en-US" sz="2500" kern="1200"/>
+          <a:endParaRPr lang="en-US" sz="2100" kern="1200"/>
         </a:p>
       </dsp:txBody>
       <dsp:txXfrm>
-        <a:off x="66753" y="3305067"/>
-        <a:ext cx="6486749" cy="1233931"/>
+        <a:off x="72227" y="3355090"/>
+        <a:ext cx="6475801" cy="1335120"/>
       </dsp:txXfrm>
     </dsp:sp>
   </dsp:spTree>
@@ -12508,7 +11147,7 @@
           </a:r>
           <a:r>
             <a:rPr lang="en-KE" sz="2100" b="0" i="0" kern="1200" baseline="0"/>
-            <a:t> Fast and effective for small datasets and text frequencies.</a:t>
+            <a:t> MultinomialNB(alpha=0.1), wrapped in CalibratedClassifierCV (sigmoid, cv=5) for probability calibration.</a:t>
           </a:r>
           <a:endParaRPr lang="en-US" sz="2100" kern="1200"/>
         </a:p>
@@ -12664,7 +11303,7 @@
           </a:r>
           <a:r>
             <a:rPr lang="en-KE" sz="2100" b="0" i="0" kern="1200" baseline="0"/>
-            <a:t> Better at identifying relationships between different character patterns.</a:t>
+            <a:t> LogisticRegression(max_iter=2000, C=1.5, class_weight='balanced'), also wrapped in CalibratedClassifierCV for reliable confidence scores.</a:t>
           </a:r>
           <a:endParaRPr lang="en-US" sz="2100" kern="1200"/>
         </a:p>
@@ -12842,642 +11481,6 @@
       <dsp:cNvGrpSpPr/>
     </dsp:nvGrpSpPr>
     <dsp:grpSpPr/>
-    <dsp:sp modelId="{3FB796B3-0969-4259-92CA-6A07BC5BA453}">
-      <dsp:nvSpPr>
-        <dsp:cNvPr id="0" name=""/>
-        <dsp:cNvSpPr/>
-      </dsp:nvSpPr>
-      <dsp:spPr>
-        <a:xfrm>
-          <a:off x="0" y="2231"/>
-          <a:ext cx="6620255" cy="1130991"/>
-        </a:xfrm>
-        <a:prstGeom prst="roundRect">
-          <a:avLst>
-            <a:gd name="adj" fmla="val 10000"/>
-          </a:avLst>
-        </a:prstGeom>
-        <a:solidFill>
-          <a:schemeClr val="accent2">
-            <a:hueOff val="0"/>
-            <a:satOff val="0"/>
-            <a:lumOff val="0"/>
-            <a:alphaOff val="0"/>
-          </a:schemeClr>
-        </a:solidFill>
-        <a:ln>
-          <a:noFill/>
-        </a:ln>
-        <a:effectLst/>
-      </dsp:spPr>
-      <dsp:style>
-        <a:lnRef idx="0">
-          <a:scrgbClr r="0" g="0" b="0"/>
-        </a:lnRef>
-        <a:fillRef idx="1">
-          <a:scrgbClr r="0" g="0" b="0"/>
-        </a:fillRef>
-        <a:effectRef idx="0">
-          <a:scrgbClr r="0" g="0" b="0"/>
-        </a:effectRef>
-        <a:fontRef idx="minor"/>
-      </dsp:style>
-    </dsp:sp>
-    <dsp:sp modelId="{5EA16962-2E07-4F4D-B70C-C65CF9B5019D}">
-      <dsp:nvSpPr>
-        <dsp:cNvPr id="0" name=""/>
-        <dsp:cNvSpPr/>
-      </dsp:nvSpPr>
-      <dsp:spPr>
-        <a:xfrm>
-          <a:off x="342124" y="256704"/>
-          <a:ext cx="622045" cy="622045"/>
-        </a:xfrm>
-        <a:prstGeom prst="rect">
-          <a:avLst/>
-        </a:prstGeom>
-        <a:blipFill>
-          <a:blip xmlns:r="http://schemas.openxmlformats.org/officeDocument/2006/relationships">
-            <a:extLst>
-              <a:ext uri="{28A0092B-C50C-407E-A947-70E740481C1C}">
-                <a14:useLocalDpi xmlns:a14="http://schemas.microsoft.com/office/drawing/2010/main" val="0"/>
-              </a:ext>
-              <a:ext uri="{96DAC541-7B7A-43D3-8B79-37D633B846F1}">
-                <asvg:svgBlip xmlns:asvg="http://schemas.microsoft.com/office/drawing/2016/SVG/main" r:embed="rId1"/>
-              </a:ext>
-            </a:extLst>
-          </a:blip>
-          <a:stretch>
-            <a:fillRect/>
-          </a:stretch>
-        </a:blipFill>
-        <a:ln w="19050" cap="flat" cmpd="sng" algn="ctr">
-          <a:noFill/>
-          <a:prstDash val="solid"/>
-          <a:miter lim="800000"/>
-        </a:ln>
-        <a:effectLst/>
-      </dsp:spPr>
-      <dsp:style>
-        <a:lnRef idx="2">
-          <a:scrgbClr r="0" g="0" b="0"/>
-        </a:lnRef>
-        <a:fillRef idx="1">
-          <a:scrgbClr r="0" g="0" b="0"/>
-        </a:fillRef>
-        <a:effectRef idx="0">
-          <a:scrgbClr r="0" g="0" b="0"/>
-        </a:effectRef>
-        <a:fontRef idx="minor">
-          <a:schemeClr val="lt1"/>
-        </a:fontRef>
-      </dsp:style>
-    </dsp:sp>
-    <dsp:sp modelId="{2B11A0BE-235E-4575-A2BD-10FFF17D9371}">
-      <dsp:nvSpPr>
-        <dsp:cNvPr id="0" name=""/>
-        <dsp:cNvSpPr/>
-      </dsp:nvSpPr>
-      <dsp:spPr>
-        <a:xfrm>
-          <a:off x="1306295" y="2231"/>
-          <a:ext cx="5313960" cy="1130991"/>
-        </a:xfrm>
-        <a:prstGeom prst="rect">
-          <a:avLst/>
-        </a:prstGeom>
-        <a:noFill/>
-        <a:ln>
-          <a:noFill/>
-        </a:ln>
-        <a:effectLst/>
-      </dsp:spPr>
-      <dsp:style>
-        <a:lnRef idx="0">
-          <a:scrgbClr r="0" g="0" b="0"/>
-        </a:lnRef>
-        <a:fillRef idx="0">
-          <a:scrgbClr r="0" g="0" b="0"/>
-        </a:fillRef>
-        <a:effectRef idx="0">
-          <a:scrgbClr r="0" g="0" b="0"/>
-        </a:effectRef>
-        <a:fontRef idx="minor"/>
-      </dsp:style>
-      <dsp:txBody>
-        <a:bodyPr spcFirstLastPara="0" vert="horz" wrap="square" lIns="119697" tIns="119697" rIns="119697" bIns="119697" numCol="1" spcCol="1270" anchor="ctr" anchorCtr="0">
-          <a:noAutofit/>
-        </a:bodyPr>
-        <a:lstStyle/>
-        <a:p>
-          <a:pPr marL="0" lvl="0" indent="0" algn="l" defTabSz="933450">
-            <a:lnSpc>
-              <a:spcPct val="90000"/>
-            </a:lnSpc>
-            <a:spcBef>
-              <a:spcPct val="0"/>
-            </a:spcBef>
-            <a:spcAft>
-              <a:spcPct val="35000"/>
-            </a:spcAft>
-            <a:buNone/>
-          </a:pPr>
-          <a:r>
-            <a:rPr lang="en-KE" sz="2100" b="1" i="0" kern="1200" baseline="0"/>
-            <a:t>Accuracy:</a:t>
-          </a:r>
-          <a:r>
-            <a:rPr lang="en-KE" sz="2100" b="0" i="0" kern="1200" baseline="0"/>
-            <a:t> Overall measure of correct predictions.</a:t>
-          </a:r>
-          <a:endParaRPr lang="en-US" sz="2100" kern="1200"/>
-        </a:p>
-      </dsp:txBody>
-      <dsp:txXfrm>
-        <a:off x="1306295" y="2231"/>
-        <a:ext cx="5313960" cy="1130991"/>
-      </dsp:txXfrm>
-    </dsp:sp>
-    <dsp:sp modelId="{55864032-D135-475D-BADD-A7A018E9EE11}">
-      <dsp:nvSpPr>
-        <dsp:cNvPr id="0" name=""/>
-        <dsp:cNvSpPr/>
-      </dsp:nvSpPr>
-      <dsp:spPr>
-        <a:xfrm>
-          <a:off x="0" y="1415970"/>
-          <a:ext cx="6620255" cy="1130991"/>
-        </a:xfrm>
-        <a:prstGeom prst="roundRect">
-          <a:avLst>
-            <a:gd name="adj" fmla="val 10000"/>
-          </a:avLst>
-        </a:prstGeom>
-        <a:solidFill>
-          <a:schemeClr val="accent3">
-            <a:hueOff val="0"/>
-            <a:satOff val="0"/>
-            <a:lumOff val="0"/>
-            <a:alphaOff val="0"/>
-          </a:schemeClr>
-        </a:solidFill>
-        <a:ln>
-          <a:noFill/>
-        </a:ln>
-        <a:effectLst/>
-      </dsp:spPr>
-      <dsp:style>
-        <a:lnRef idx="0">
-          <a:scrgbClr r="0" g="0" b="0"/>
-        </a:lnRef>
-        <a:fillRef idx="1">
-          <a:scrgbClr r="0" g="0" b="0"/>
-        </a:fillRef>
-        <a:effectRef idx="0">
-          <a:scrgbClr r="0" g="0" b="0"/>
-        </a:effectRef>
-        <a:fontRef idx="minor"/>
-      </dsp:style>
-    </dsp:sp>
-    <dsp:sp modelId="{2EA6AC5D-C203-42E0-AE3D-74A6204F28DB}">
-      <dsp:nvSpPr>
-        <dsp:cNvPr id="0" name=""/>
-        <dsp:cNvSpPr/>
-      </dsp:nvSpPr>
-      <dsp:spPr>
-        <a:xfrm>
-          <a:off x="342124" y="1670443"/>
-          <a:ext cx="622045" cy="622045"/>
-        </a:xfrm>
-        <a:prstGeom prst="rect">
-          <a:avLst/>
-        </a:prstGeom>
-        <a:blipFill>
-          <a:blip xmlns:r="http://schemas.openxmlformats.org/officeDocument/2006/relationships">
-            <a:extLst>
-              <a:ext uri="{28A0092B-C50C-407E-A947-70E740481C1C}">
-                <a14:useLocalDpi xmlns:a14="http://schemas.microsoft.com/office/drawing/2010/main" val="0"/>
-              </a:ext>
-              <a:ext uri="{96DAC541-7B7A-43D3-8B79-37D633B846F1}">
-                <asvg:svgBlip xmlns:asvg="http://schemas.microsoft.com/office/drawing/2016/SVG/main" r:embed="rId2"/>
-              </a:ext>
-            </a:extLst>
-          </a:blip>
-          <a:stretch>
-            <a:fillRect/>
-          </a:stretch>
-        </a:blipFill>
-        <a:ln w="19050" cap="flat" cmpd="sng" algn="ctr">
-          <a:noFill/>
-          <a:prstDash val="solid"/>
-          <a:miter lim="800000"/>
-        </a:ln>
-        <a:effectLst/>
-      </dsp:spPr>
-      <dsp:style>
-        <a:lnRef idx="2">
-          <a:scrgbClr r="0" g="0" b="0"/>
-        </a:lnRef>
-        <a:fillRef idx="1">
-          <a:scrgbClr r="0" g="0" b="0"/>
-        </a:fillRef>
-        <a:effectRef idx="0">
-          <a:scrgbClr r="0" g="0" b="0"/>
-        </a:effectRef>
-        <a:fontRef idx="minor">
-          <a:schemeClr val="lt1"/>
-        </a:fontRef>
-      </dsp:style>
-    </dsp:sp>
-    <dsp:sp modelId="{3BF8863F-FA5B-42F4-AB8C-5CC727885905}">
-      <dsp:nvSpPr>
-        <dsp:cNvPr id="0" name=""/>
-        <dsp:cNvSpPr/>
-      </dsp:nvSpPr>
-      <dsp:spPr>
-        <a:xfrm>
-          <a:off x="1306295" y="1415970"/>
-          <a:ext cx="5313960" cy="1130991"/>
-        </a:xfrm>
-        <a:prstGeom prst="rect">
-          <a:avLst/>
-        </a:prstGeom>
-        <a:noFill/>
-        <a:ln>
-          <a:noFill/>
-        </a:ln>
-        <a:effectLst/>
-      </dsp:spPr>
-      <dsp:style>
-        <a:lnRef idx="0">
-          <a:scrgbClr r="0" g="0" b="0"/>
-        </a:lnRef>
-        <a:fillRef idx="0">
-          <a:scrgbClr r="0" g="0" b="0"/>
-        </a:fillRef>
-        <a:effectRef idx="0">
-          <a:scrgbClr r="0" g="0" b="0"/>
-        </a:effectRef>
-        <a:fontRef idx="minor"/>
-      </dsp:style>
-      <dsp:txBody>
-        <a:bodyPr spcFirstLastPara="0" vert="horz" wrap="square" lIns="119697" tIns="119697" rIns="119697" bIns="119697" numCol="1" spcCol="1270" anchor="ctr" anchorCtr="0">
-          <a:noAutofit/>
-        </a:bodyPr>
-        <a:lstStyle/>
-        <a:p>
-          <a:pPr marL="0" lvl="0" indent="0" algn="l" defTabSz="933450">
-            <a:lnSpc>
-              <a:spcPct val="90000"/>
-            </a:lnSpc>
-            <a:spcBef>
-              <a:spcPct val="0"/>
-            </a:spcBef>
-            <a:spcAft>
-              <a:spcPct val="35000"/>
-            </a:spcAft>
-            <a:buNone/>
-          </a:pPr>
-          <a:r>
-            <a:rPr lang="en-KE" sz="2100" b="1" i="0" kern="1200" baseline="0"/>
-            <a:t>Precision &amp; Recall:</a:t>
-          </a:r>
-          <a:r>
-            <a:rPr lang="en-KE" sz="2100" b="0" i="0" kern="1200" baseline="0"/>
-            <a:t> Measure the accuracy of positive predictions and the ability to find all relevant cases.</a:t>
-          </a:r>
-          <a:endParaRPr lang="en-US" sz="2100" kern="1200"/>
-        </a:p>
-      </dsp:txBody>
-      <dsp:txXfrm>
-        <a:off x="1306295" y="1415970"/>
-        <a:ext cx="5313960" cy="1130991"/>
-      </dsp:txXfrm>
-    </dsp:sp>
-    <dsp:sp modelId="{B80B12C7-4B31-4128-A745-CB8FA28653CA}">
-      <dsp:nvSpPr>
-        <dsp:cNvPr id="0" name=""/>
-        <dsp:cNvSpPr/>
-      </dsp:nvSpPr>
-      <dsp:spPr>
-        <a:xfrm>
-          <a:off x="0" y="2829709"/>
-          <a:ext cx="6620255" cy="1130991"/>
-        </a:xfrm>
-        <a:prstGeom prst="roundRect">
-          <a:avLst>
-            <a:gd name="adj" fmla="val 10000"/>
-          </a:avLst>
-        </a:prstGeom>
-        <a:solidFill>
-          <a:schemeClr val="accent4">
-            <a:hueOff val="0"/>
-            <a:satOff val="0"/>
-            <a:lumOff val="0"/>
-            <a:alphaOff val="0"/>
-          </a:schemeClr>
-        </a:solidFill>
-        <a:ln>
-          <a:noFill/>
-        </a:ln>
-        <a:effectLst/>
-      </dsp:spPr>
-      <dsp:style>
-        <a:lnRef idx="0">
-          <a:scrgbClr r="0" g="0" b="0"/>
-        </a:lnRef>
-        <a:fillRef idx="1">
-          <a:scrgbClr r="0" g="0" b="0"/>
-        </a:fillRef>
-        <a:effectRef idx="0">
-          <a:scrgbClr r="0" g="0" b="0"/>
-        </a:effectRef>
-        <a:fontRef idx="minor"/>
-      </dsp:style>
-    </dsp:sp>
-    <dsp:sp modelId="{14562713-5449-48C0-A8D3-CEB9866F8076}">
-      <dsp:nvSpPr>
-        <dsp:cNvPr id="0" name=""/>
-        <dsp:cNvSpPr/>
-      </dsp:nvSpPr>
-      <dsp:spPr>
-        <a:xfrm>
-          <a:off x="342124" y="3084182"/>
-          <a:ext cx="622045" cy="622045"/>
-        </a:xfrm>
-        <a:prstGeom prst="rect">
-          <a:avLst/>
-        </a:prstGeom>
-        <a:blipFill>
-          <a:blip xmlns:r="http://schemas.openxmlformats.org/officeDocument/2006/relationships">
-            <a:extLst>
-              <a:ext uri="{28A0092B-C50C-407E-A947-70E740481C1C}">
-                <a14:useLocalDpi xmlns:a14="http://schemas.microsoft.com/office/drawing/2010/main" val="0"/>
-              </a:ext>
-              <a:ext uri="{96DAC541-7B7A-43D3-8B79-37D633B846F1}">
-                <asvg:svgBlip xmlns:asvg="http://schemas.microsoft.com/office/drawing/2016/SVG/main" r:embed="rId3"/>
-              </a:ext>
-            </a:extLst>
-          </a:blip>
-          <a:stretch>
-            <a:fillRect/>
-          </a:stretch>
-        </a:blipFill>
-        <a:ln w="19050" cap="flat" cmpd="sng" algn="ctr">
-          <a:noFill/>
-          <a:prstDash val="solid"/>
-          <a:miter lim="800000"/>
-        </a:ln>
-        <a:effectLst/>
-      </dsp:spPr>
-      <dsp:style>
-        <a:lnRef idx="2">
-          <a:scrgbClr r="0" g="0" b="0"/>
-        </a:lnRef>
-        <a:fillRef idx="1">
-          <a:scrgbClr r="0" g="0" b="0"/>
-        </a:fillRef>
-        <a:effectRef idx="0">
-          <a:scrgbClr r="0" g="0" b="0"/>
-        </a:effectRef>
-        <a:fontRef idx="minor">
-          <a:schemeClr val="lt1"/>
-        </a:fontRef>
-      </dsp:style>
-    </dsp:sp>
-    <dsp:sp modelId="{4365C124-CC5E-48B7-B456-210099A3F1FF}">
-      <dsp:nvSpPr>
-        <dsp:cNvPr id="0" name=""/>
-        <dsp:cNvSpPr/>
-      </dsp:nvSpPr>
-      <dsp:spPr>
-        <a:xfrm>
-          <a:off x="1306295" y="2829709"/>
-          <a:ext cx="5313960" cy="1130991"/>
-        </a:xfrm>
-        <a:prstGeom prst="rect">
-          <a:avLst/>
-        </a:prstGeom>
-        <a:noFill/>
-        <a:ln>
-          <a:noFill/>
-        </a:ln>
-        <a:effectLst/>
-      </dsp:spPr>
-      <dsp:style>
-        <a:lnRef idx="0">
-          <a:scrgbClr r="0" g="0" b="0"/>
-        </a:lnRef>
-        <a:fillRef idx="0">
-          <a:scrgbClr r="0" g="0" b="0"/>
-        </a:fillRef>
-        <a:effectRef idx="0">
-          <a:scrgbClr r="0" g="0" b="0"/>
-        </a:effectRef>
-        <a:fontRef idx="minor"/>
-      </dsp:style>
-      <dsp:txBody>
-        <a:bodyPr spcFirstLastPara="0" vert="horz" wrap="square" lIns="119697" tIns="119697" rIns="119697" bIns="119697" numCol="1" spcCol="1270" anchor="ctr" anchorCtr="0">
-          <a:noAutofit/>
-        </a:bodyPr>
-        <a:lstStyle/>
-        <a:p>
-          <a:pPr marL="0" lvl="0" indent="0" algn="l" defTabSz="933450">
-            <a:lnSpc>
-              <a:spcPct val="90000"/>
-            </a:lnSpc>
-            <a:spcBef>
-              <a:spcPct val="0"/>
-            </a:spcBef>
-            <a:spcAft>
-              <a:spcPct val="35000"/>
-            </a:spcAft>
-            <a:buNone/>
-          </a:pPr>
-          <a:r>
-            <a:rPr lang="en-KE" sz="2100" b="1" i="0" kern="1200" baseline="0"/>
-            <a:t>F1-Score:</a:t>
-          </a:r>
-          <a:r>
-            <a:rPr lang="en-KE" sz="2100" b="0" i="0" kern="1200" baseline="0"/>
-            <a:t> The harmonic mean of precision and recall.</a:t>
-          </a:r>
-          <a:endParaRPr lang="en-US" sz="2100" kern="1200"/>
-        </a:p>
-      </dsp:txBody>
-      <dsp:txXfrm>
-        <a:off x="1306295" y="2829709"/>
-        <a:ext cx="5313960" cy="1130991"/>
-      </dsp:txXfrm>
-    </dsp:sp>
-    <dsp:sp modelId="{6523A919-8772-4CF4-9AE8-5C3E930DB19F}">
-      <dsp:nvSpPr>
-        <dsp:cNvPr id="0" name=""/>
-        <dsp:cNvSpPr/>
-      </dsp:nvSpPr>
-      <dsp:spPr>
-        <a:xfrm>
-          <a:off x="0" y="4243449"/>
-          <a:ext cx="6620255" cy="1130991"/>
-        </a:xfrm>
-        <a:prstGeom prst="roundRect">
-          <a:avLst>
-            <a:gd name="adj" fmla="val 10000"/>
-          </a:avLst>
-        </a:prstGeom>
-        <a:solidFill>
-          <a:schemeClr val="accent5">
-            <a:hueOff val="0"/>
-            <a:satOff val="0"/>
-            <a:lumOff val="0"/>
-            <a:alphaOff val="0"/>
-          </a:schemeClr>
-        </a:solidFill>
-        <a:ln>
-          <a:noFill/>
-        </a:ln>
-        <a:effectLst/>
-      </dsp:spPr>
-      <dsp:style>
-        <a:lnRef idx="0">
-          <a:scrgbClr r="0" g="0" b="0"/>
-        </a:lnRef>
-        <a:fillRef idx="1">
-          <a:scrgbClr r="0" g="0" b="0"/>
-        </a:fillRef>
-        <a:effectRef idx="0">
-          <a:scrgbClr r="0" g="0" b="0"/>
-        </a:effectRef>
-        <a:fontRef idx="minor"/>
-      </dsp:style>
-    </dsp:sp>
-    <dsp:sp modelId="{D7F21D8C-0B10-44F0-9666-56324AD98F49}">
-      <dsp:nvSpPr>
-        <dsp:cNvPr id="0" name=""/>
-        <dsp:cNvSpPr/>
-      </dsp:nvSpPr>
-      <dsp:spPr>
-        <a:xfrm>
-          <a:off x="342124" y="4497922"/>
-          <a:ext cx="622045" cy="622045"/>
-        </a:xfrm>
-        <a:prstGeom prst="rect">
-          <a:avLst/>
-        </a:prstGeom>
-        <a:blipFill>
-          <a:blip xmlns:r="http://schemas.openxmlformats.org/officeDocument/2006/relationships">
-            <a:extLst>
-              <a:ext uri="{28A0092B-C50C-407E-A947-70E740481C1C}">
-                <a14:useLocalDpi xmlns:a14="http://schemas.microsoft.com/office/drawing/2010/main" val="0"/>
-              </a:ext>
-              <a:ext uri="{96DAC541-7B7A-43D3-8B79-37D633B846F1}">
-                <asvg:svgBlip xmlns:asvg="http://schemas.microsoft.com/office/drawing/2016/SVG/main" r:embed="rId4"/>
-              </a:ext>
-            </a:extLst>
-          </a:blip>
-          <a:stretch>
-            <a:fillRect/>
-          </a:stretch>
-        </a:blipFill>
-        <a:ln w="19050" cap="flat" cmpd="sng" algn="ctr">
-          <a:noFill/>
-          <a:prstDash val="solid"/>
-          <a:miter lim="800000"/>
-        </a:ln>
-        <a:effectLst/>
-      </dsp:spPr>
-      <dsp:style>
-        <a:lnRef idx="2">
-          <a:scrgbClr r="0" g="0" b="0"/>
-        </a:lnRef>
-        <a:fillRef idx="1">
-          <a:scrgbClr r="0" g="0" b="0"/>
-        </a:fillRef>
-        <a:effectRef idx="0">
-          <a:scrgbClr r="0" g="0" b="0"/>
-        </a:effectRef>
-        <a:fontRef idx="minor">
-          <a:schemeClr val="lt1"/>
-        </a:fontRef>
-      </dsp:style>
-    </dsp:sp>
-    <dsp:sp modelId="{6FBE637C-FB7C-4C9F-BD88-B23129DA6949}">
-      <dsp:nvSpPr>
-        <dsp:cNvPr id="0" name=""/>
-        <dsp:cNvSpPr/>
-      </dsp:nvSpPr>
-      <dsp:spPr>
-        <a:xfrm>
-          <a:off x="1306295" y="4243449"/>
-          <a:ext cx="5313960" cy="1130991"/>
-        </a:xfrm>
-        <a:prstGeom prst="rect">
-          <a:avLst/>
-        </a:prstGeom>
-        <a:noFill/>
-        <a:ln>
-          <a:noFill/>
-        </a:ln>
-        <a:effectLst/>
-      </dsp:spPr>
-      <dsp:style>
-        <a:lnRef idx="0">
-          <a:scrgbClr r="0" g="0" b="0"/>
-        </a:lnRef>
-        <a:fillRef idx="0">
-          <a:scrgbClr r="0" g="0" b="0"/>
-        </a:fillRef>
-        <a:effectRef idx="0">
-          <a:scrgbClr r="0" g="0" b="0"/>
-        </a:effectRef>
-        <a:fontRef idx="minor"/>
-      </dsp:style>
-      <dsp:txBody>
-        <a:bodyPr spcFirstLastPara="0" vert="horz" wrap="square" lIns="119697" tIns="119697" rIns="119697" bIns="119697" numCol="1" spcCol="1270" anchor="ctr" anchorCtr="0">
-          <a:noAutofit/>
-        </a:bodyPr>
-        <a:lstStyle/>
-        <a:p>
-          <a:pPr marL="0" lvl="0" indent="0" algn="l" defTabSz="933450">
-            <a:lnSpc>
-              <a:spcPct val="90000"/>
-            </a:lnSpc>
-            <a:spcBef>
-              <a:spcPct val="0"/>
-            </a:spcBef>
-            <a:spcAft>
-              <a:spcPct val="35000"/>
-            </a:spcAft>
-            <a:buNone/>
-          </a:pPr>
-          <a:r>
-            <a:rPr lang="en-KE" sz="2100" b="1" i="0" kern="1200" baseline="0"/>
-            <a:t>Confusion Matrix:</a:t>
-          </a:r>
-          <a:r>
-            <a:rPr lang="en-KE" sz="2100" b="0" i="0" kern="1200" baseline="0"/>
-            <a:t> Identifies how often the model confuses one language with another.</a:t>
-          </a:r>
-          <a:endParaRPr lang="en-US" sz="2100" kern="1200"/>
-        </a:p>
-      </dsp:txBody>
-      <dsp:txXfrm>
-        <a:off x="1306295" y="4243449"/>
-        <a:ext cx="5313960" cy="1130991"/>
-      </dsp:txXfrm>
-    </dsp:sp>
-  </dsp:spTree>
-</dsp:drawing>
-</file>
-
-<file path=ppt/diagrams/drawing7.xml><?xml version="1.0" encoding="utf-8"?>
-<dsp:drawing xmlns:dgm="http://schemas.openxmlformats.org/drawingml/2006/diagram" xmlns:dsp="http://schemas.microsoft.com/office/drawing/2008/diagram" xmlns:a="http://schemas.openxmlformats.org/drawingml/2006/main">
-  <dsp:spTree>
-    <dsp:nvGrpSpPr>
-      <dsp:cNvPr id="0" name=""/>
-      <dsp:cNvGrpSpPr/>
-    </dsp:nvGrpSpPr>
-    <dsp:grpSpPr/>
     <dsp:sp modelId="{2B53239B-6807-415F-8045-4352F2E3F4CC}">
       <dsp:nvSpPr>
         <dsp:cNvPr id="0" name=""/>
@@ -13485,7 +11488,7 @@
       </dsp:nvSpPr>
       <dsp:spPr>
         <a:xfrm>
-          <a:off x="579241" y="1534747"/>
+          <a:off x="579241" y="1251463"/>
           <a:ext cx="877784" cy="877784"/>
         </a:xfrm>
         <a:prstGeom prst="rect">
@@ -13535,8 +11538,8 @@
       </dsp:nvSpPr>
       <dsp:spPr>
         <a:xfrm>
-          <a:off x="42817" y="2710444"/>
-          <a:ext cx="1950633" cy="720000"/>
+          <a:off x="42817" y="2498728"/>
+          <a:ext cx="1950633" cy="1215000"/>
         </a:xfrm>
         <a:prstGeom prst="rect">
           <a:avLst/>
@@ -13565,7 +11568,7 @@
         </a:bodyPr>
         <a:lstStyle/>
         <a:p>
-          <a:pPr marL="0" lvl="0" indent="0" algn="ctr" defTabSz="577850">
+          <a:pPr marL="0" lvl="0" indent="0" algn="ctr" defTabSz="488950">
             <a:lnSpc>
               <a:spcPct val="90000"/>
             </a:lnSpc>
@@ -13578,27 +11581,27 @@
             <a:buNone/>
           </a:pPr>
           <a:r>
-            <a:rPr lang="en-KE" sz="1300" b="1" i="0" kern="1200" baseline="0"/>
+            <a:rPr lang="en-KE" sz="1100" b="1" i="0" kern="1200" baseline="0"/>
             <a:t>User Interface:</a:t>
           </a:r>
           <a:r>
-            <a:rPr lang="en-KE" sz="1300" b="0" i="0" kern="1200" baseline="0"/>
+            <a:rPr lang="en-KE" sz="1100" b="0" i="0" kern="1200" baseline="0"/>
             <a:t> Built using </a:t>
           </a:r>
           <a:r>
-            <a:rPr lang="en-KE" sz="1300" b="1" i="0" kern="1200" baseline="0"/>
+            <a:rPr lang="en-KE" sz="1100" b="1" i="0" kern="1200" baseline="0"/>
             <a:t>Streamlit</a:t>
           </a:r>
           <a:r>
-            <a:rPr lang="en-KE" sz="1300" b="0" i="0" kern="1200" baseline="0"/>
+            <a:rPr lang="en-KE" sz="1100" b="0" i="0" kern="1200" baseline="0"/>
             <a:t> for a simple web application experience.</a:t>
           </a:r>
-          <a:endParaRPr lang="en-US" sz="1300" kern="1200"/>
+          <a:endParaRPr lang="en-US" sz="1100" kern="1200"/>
         </a:p>
       </dsp:txBody>
       <dsp:txXfrm>
-        <a:off x="42817" y="2710444"/>
-        <a:ext cx="1950633" cy="720000"/>
+        <a:off x="42817" y="2498728"/>
+        <a:ext cx="1950633" cy="1215000"/>
       </dsp:txXfrm>
     </dsp:sp>
     <dsp:sp modelId="{C5F513A6-A2A7-481E-A220-259E0D222FA0}">
@@ -13608,7 +11611,7 @@
       </dsp:nvSpPr>
       <dsp:spPr>
         <a:xfrm>
-          <a:off x="2871235" y="1534747"/>
+          <a:off x="2871235" y="1251463"/>
           <a:ext cx="877784" cy="877784"/>
         </a:xfrm>
         <a:prstGeom prst="rect">
@@ -13658,8 +11661,8 @@
       </dsp:nvSpPr>
       <dsp:spPr>
         <a:xfrm>
-          <a:off x="2334811" y="2710444"/>
-          <a:ext cx="1950633" cy="720000"/>
+          <a:off x="2334811" y="2498728"/>
+          <a:ext cx="1950633" cy="1215000"/>
         </a:xfrm>
         <a:prstGeom prst="rect">
           <a:avLst/>
@@ -13688,7 +11691,7 @@
         </a:bodyPr>
         <a:lstStyle/>
         <a:p>
-          <a:pPr marL="0" lvl="0" indent="0" algn="ctr" defTabSz="577850">
+          <a:pPr marL="0" lvl="0" indent="0" algn="ctr" defTabSz="488950">
             <a:lnSpc>
               <a:spcPct val="90000"/>
             </a:lnSpc>
@@ -13701,19 +11704,19 @@
             <a:buNone/>
           </a:pPr>
           <a:r>
-            <a:rPr lang="en-KE" sz="1300" b="1" i="0" kern="1200" baseline="0"/>
+            <a:rPr lang="en-KE" sz="1100" b="1" i="0" kern="1200" baseline="0"/>
             <a:t>Functionality:</a:t>
           </a:r>
           <a:r>
-            <a:rPr lang="en-KE" sz="1300" b="0" i="0" kern="1200" baseline="0"/>
+            <a:rPr lang="en-KE" sz="1100" b="0" i="0" kern="1200" baseline="0"/>
             <a:t> Users can enter text, click a "Predict Language" button, and view the results.</a:t>
           </a:r>
-          <a:endParaRPr lang="en-US" sz="1300" kern="1200"/>
+          <a:endParaRPr lang="en-US" sz="1100" kern="1200"/>
         </a:p>
       </dsp:txBody>
       <dsp:txXfrm>
-        <a:off x="2334811" y="2710444"/>
-        <a:ext cx="1950633" cy="720000"/>
+        <a:off x="2334811" y="2498728"/>
+        <a:ext cx="1950633" cy="1215000"/>
       </dsp:txXfrm>
     </dsp:sp>
     <dsp:sp modelId="{4FC4F5D6-5E36-4AF3-A237-40C1D217A2EA}">
@@ -13723,7 +11726,7 @@
       </dsp:nvSpPr>
       <dsp:spPr>
         <a:xfrm>
-          <a:off x="5163229" y="1534747"/>
+          <a:off x="5163229" y="1251463"/>
           <a:ext cx="877784" cy="877784"/>
         </a:xfrm>
         <a:prstGeom prst="rect">
@@ -13773,8 +11776,8 @@
       </dsp:nvSpPr>
       <dsp:spPr>
         <a:xfrm>
-          <a:off x="4626805" y="2710444"/>
-          <a:ext cx="1950633" cy="720000"/>
+          <a:off x="4626805" y="2498728"/>
+          <a:ext cx="1950633" cy="1215000"/>
         </a:xfrm>
         <a:prstGeom prst="rect">
           <a:avLst/>
@@ -13803,7 +11806,7 @@
         </a:bodyPr>
         <a:lstStyle/>
         <a:p>
-          <a:pPr marL="0" lvl="0" indent="0" algn="ctr" defTabSz="577850">
+          <a:pPr marL="0" lvl="0" indent="0" algn="ctr" defTabSz="488950">
             <a:lnSpc>
               <a:spcPct val="90000"/>
             </a:lnSpc>
@@ -13816,26 +11819,26 @@
             <a:buNone/>
           </a:pPr>
           <a:r>
-            <a:rPr lang="en-KE" sz="1300" b="1" i="0" kern="1200" baseline="0"/>
+            <a:rPr lang="en-KE" sz="1100" b="1" i="0" kern="1200" baseline="0"/>
             <a:t>NLP Tools:</a:t>
           </a:r>
           <a:r>
-            <a:rPr lang="en-KE" sz="1300" b="0" i="0" kern="1200" baseline="0"/>
-            <a:t> Powered by nltk, langdetect, and googletrans</a:t>
+            <a:rPr lang="en-KE" sz="1100" b="0" i="0" kern="1200" baseline="0"/>
+            <a:t> scikit-learn (TfidfVectorizer, MultinomialNB, LogisticRegression, VotingClassifier, CalibratedClassifierCV), streamlit, matplotlib, pandas, numpy, re, os, zipfile, string, random, datetime.</a:t>
           </a:r>
-          <a:endParaRPr lang="en-US" sz="1300" kern="1200"/>
+          <a:endParaRPr lang="en-US" sz="1100" kern="1200"/>
         </a:p>
       </dsp:txBody>
       <dsp:txXfrm>
-        <a:off x="4626805" y="2710444"/>
-        <a:ext cx="1950633" cy="720000"/>
+        <a:off x="4626805" y="2498728"/>
+        <a:ext cx="1950633" cy="1215000"/>
       </dsp:txXfrm>
     </dsp:sp>
   </dsp:spTree>
 </dsp:drawing>
 </file>
 
-<file path=ppt/diagrams/drawing8.xml><?xml version="1.0" encoding="utf-8"?>
+<file path=ppt/diagrams/drawing7.xml><?xml version="1.0" encoding="utf-8"?>
 <dsp:drawing xmlns:dgm="http://schemas.openxmlformats.org/drawingml/2006/diagram" xmlns:dsp="http://schemas.microsoft.com/office/drawing/2008/diagram" xmlns:a="http://schemas.openxmlformats.org/drawingml/2006/main">
   <dsp:spTree>
     <dsp:nvGrpSpPr>
@@ -14212,7 +12215,7 @@
           </a:r>
           <a:r>
             <a:rPr lang="en-KE" sz="2200" b="0" i="0" kern="1200" baseline="0"/>
-            <a:t> Pandas 2.3.3 and NumPy 2.4.2.</a:t>
+            <a:t> Pandas and NumPy (versions not pinned in requirements.txt).</a:t>
           </a:r>
           <a:endParaRPr lang="en-US" sz="2200" kern="1200"/>
         </a:p>
@@ -15649,300 +13652,6 @@
 </file>
 
 <file path=ppt/diagrams/layout6.xml><?xml version="1.0" encoding="utf-8"?>
-<dgm:layoutDef xmlns:dgm="http://schemas.openxmlformats.org/drawingml/2006/diagram" xmlns:a="http://schemas.openxmlformats.org/drawingml/2006/main" uniqueId="urn:microsoft.com/office/officeart/2018/2/layout/IconVerticalSolidList">
-  <dgm:title val="Icon Vertical Solid List"/>
-  <dgm:desc val="Use to show a series of visuals from top to bottom with Level 1 or Level 1 and Level 2 text grouped in a shape. Works best with icons or small pictures with lengthier descriptions."/>
-  <dgm:catLst>
-    <dgm:cat type="icon" pri="500"/>
-  </dgm:catLst>
-  <dgm:sampData useDef="1">
-    <dgm:dataModel>
-      <dgm:ptLst/>
-      <dgm:bg/>
-      <dgm:whole/>
-    </dgm:dataModel>
-  </dgm:sampData>
-  <dgm:styleData useDef="1">
-    <dgm:dataModel>
-      <dgm:ptLst/>
-      <dgm:bg/>
-      <dgm:whole/>
-    </dgm:dataModel>
-  </dgm:styleData>
-  <dgm:clrData useDef="1">
-    <dgm:dataModel>
-      <dgm:ptLst/>
-      <dgm:bg/>
-      <dgm:whole/>
-    </dgm:dataModel>
-  </dgm:clrData>
-  <dgm:layoutNode name="root">
-    <dgm:varLst>
-      <dgm:dir/>
-      <dgm:resizeHandles val="exact"/>
-    </dgm:varLst>
-    <dgm:choose name="Name0">
-      <dgm:if name="Name1" axis="self" func="var" arg="dir" op="equ" val="norm">
-        <dgm:alg type="lin">
-          <dgm:param type="linDir" val="fromT"/>
-          <dgm:param type="nodeHorzAlign" val="l"/>
-        </dgm:alg>
-      </dgm:if>
-      <dgm:else name="Name2">
-        <dgm:alg type="lin">
-          <dgm:param type="linDir" val="fromT"/>
-          <dgm:param type="nodeHorzAlign" val="r"/>
-        </dgm:alg>
-      </dgm:else>
-    </dgm:choose>
-    <dgm:shape xmlns:r="http://schemas.openxmlformats.org/officeDocument/2006/relationships" r:blip="">
-      <dgm:adjLst/>
-    </dgm:shape>
-    <dgm:presOf/>
-    <dgm:choose name="Name3">
-      <dgm:if name="Name4" axis="ch" ptType="node" func="cnt" op="lte" val="3">
-        <dgm:constrLst>
-          <dgm:constr type="h" for="ch" forName="compNode" refType="h" fact="0.3"/>
-          <dgm:constr type="w" for="ch" forName="compNode" refType="w"/>
-          <dgm:constr type="h" for="ch" forName="sibTrans" refType="h" refFor="ch" refForName="compNode" fact="0.25"/>
-          <dgm:constr type="primFontSz" for="des" forName="parTx" val="25"/>
-          <dgm:constr type="primFontSz" for="des" forName="desTx" refType="primFontSz" refFor="des" refForName="parTx" op="lte" fact="0.75"/>
-          <dgm:constr type="h" for="des" forName="compNode" op="equ"/>
-          <dgm:constr type="h" for="des" forName="bgRect" op="equ"/>
-          <dgm:constr type="h" for="des" forName="iconRect" op="equ"/>
-          <dgm:constr type="w" for="des" forName="iconRect" op="equ"/>
-          <dgm:constr type="h" for="des" forName="spaceRect" op="equ"/>
-          <dgm:constr type="h" for="des" forName="parTx" op="equ"/>
-          <dgm:constr type="h" for="des" forName="desTx" op="equ"/>
-        </dgm:constrLst>
-      </dgm:if>
-      <dgm:if name="Name5" axis="ch" ptType="node" func="cnt" op="lte" val="4">
-        <dgm:constrLst>
-          <dgm:constr type="h" for="ch" forName="compNode" refType="h" fact="0.3"/>
-          <dgm:constr type="w" for="ch" forName="compNode" refType="w"/>
-          <dgm:constr type="h" for="ch" forName="sibTrans" refType="h" refFor="ch" refForName="compNode" fact="0.25"/>
-          <dgm:constr type="primFontSz" for="des" forName="parTx" val="22"/>
-          <dgm:constr type="primFontSz" for="des" forName="desTx" refType="primFontSz" refFor="des" refForName="parTx" op="lte" fact="0.75"/>
-          <dgm:constr type="h" for="des" forName="compNode" op="equ"/>
-          <dgm:constr type="h" for="des" forName="bgRect" op="equ"/>
-          <dgm:constr type="h" for="des" forName="iconRect" op="equ"/>
-          <dgm:constr type="w" for="des" forName="iconRect" op="equ"/>
-          <dgm:constr type="h" for="des" forName="spaceRect" op="equ"/>
-          <dgm:constr type="h" for="des" forName="parTx" op="equ"/>
-          <dgm:constr type="h" for="des" forName="desTx" op="equ"/>
-        </dgm:constrLst>
-      </dgm:if>
-      <dgm:if name="Name6" axis="ch" ptType="node" func="cnt" op="lte" val="6">
-        <dgm:constrLst>
-          <dgm:constr type="h" for="ch" forName="compNode" refType="h" fact="0.3"/>
-          <dgm:constr type="w" for="ch" forName="compNode" refType="w"/>
-          <dgm:constr type="h" for="ch" forName="sibTrans" refType="h" refFor="ch" refForName="compNode" fact="0.25"/>
-          <dgm:constr type="primFontSz" for="des" forName="parTx" val="19"/>
-          <dgm:constr type="primFontSz" for="des" forName="desTx" refType="primFontSz" refFor="des" refForName="parTx" op="lte" fact="0.75"/>
-          <dgm:constr type="h" for="des" forName="compNode" op="equ"/>
-          <dgm:constr type="h" for="des" forName="bgRect" op="equ"/>
-          <dgm:constr type="h" for="des" forName="iconRect" op="equ"/>
-          <dgm:constr type="w" for="des" forName="iconRect" op="equ"/>
-          <dgm:constr type="h" for="des" forName="spaceRect" op="equ"/>
-          <dgm:constr type="h" for="des" forName="parTx" op="equ"/>
-          <dgm:constr type="h" for="des" forName="desTx" op="equ"/>
-        </dgm:constrLst>
-      </dgm:if>
-      <dgm:else name="Name7">
-        <dgm:constrLst>
-          <dgm:constr type="h" for="ch" forName="compNode" refType="h" fact="0.3"/>
-          <dgm:constr type="w" for="ch" forName="compNode" refType="w"/>
-          <dgm:constr type="h" for="ch" forName="sibTrans" refType="h" refFor="ch" refForName="compNode" fact="0.25"/>
-          <dgm:constr type="primFontSz" for="des" forName="parTx" val="16"/>
-          <dgm:constr type="primFontSz" for="des" forName="desTx" refType="primFontSz" refFor="des" refForName="parTx" op="lte" fact="0.75"/>
-          <dgm:constr type="h" for="des" forName="compNode" op="equ"/>
-          <dgm:constr type="h" for="des" forName="bgRect" op="equ"/>
-          <dgm:constr type="h" for="des" forName="iconRect" op="equ"/>
-          <dgm:constr type="w" for="des" forName="iconRect" op="equ"/>
-          <dgm:constr type="h" for="des" forName="spaceRect" op="equ"/>
-          <dgm:constr type="h" for="des" forName="parTx" op="equ"/>
-          <dgm:constr type="h" for="des" forName="desTx" op="equ"/>
-        </dgm:constrLst>
-      </dgm:else>
-    </dgm:choose>
-    <dgm:ruleLst>
-      <dgm:rule type="h" for="ch" forName="compNode" val="0" fact="NaN" max="NaN"/>
-    </dgm:ruleLst>
-    <dgm:forEach name="Name8" axis="ch" ptType="node">
-      <dgm:layoutNode name="compNode">
-        <dgm:alg type="composite"/>
-        <dgm:shape xmlns:r="http://schemas.openxmlformats.org/officeDocument/2006/relationships" r:blip="">
-          <dgm:adjLst/>
-        </dgm:shape>
-        <dgm:presOf axis="self"/>
-        <dgm:choose name="Name9">
-          <dgm:if name="Name10" axis="ch" ptType="node" func="cnt" op="gte" val="1">
-            <dgm:constrLst>
-              <dgm:constr type="w" for="ch" forName="bgRect" refType="w"/>
-              <dgm:constr type="h" for="ch" forName="bgRect" refType="h"/>
-              <dgm:constr type="l" for="ch" forName="bgRect"/>
-              <dgm:constr type="t" for="ch" forName="bgRect"/>
-              <dgm:constr type="h" for="ch" forName="iconRect" refType="h" fact="0.55"/>
-              <dgm:constr type="w" for="ch" forName="iconRect" refType="h" refFor="ch" refForName="iconRect"/>
-              <dgm:constr type="l" for="ch" forName="iconRect" refType="h" refFor="ch" refForName="iconRect" fact="0.55"/>
-              <dgm:constr type="ctrY" for="ch" forName="iconRect" refType="ctrY" refFor="ch" refForName="bgRect"/>
-              <dgm:constr type="w" for="ch" forName="spaceRect" refType="l" refFor="ch" refForName="iconRect"/>
-              <dgm:constr type="h" for="ch" forName="spaceRect" refType="h"/>
-              <dgm:constr type="l" for="ch" forName="spaceRect" refType="r" refFor="ch" refForName="iconRect"/>
-              <dgm:constr type="t" for="ch" forName="spaceRect"/>
-              <dgm:constr type="w" for="ch" forName="parTx" refType="w" fact="0.45"/>
-              <dgm:constr type="h" for="ch" forName="parTx" refType="h"/>
-              <dgm:constr type="l" for="ch" forName="parTx" refType="r" refFor="ch" refForName="spaceRect"/>
-              <dgm:constr type="t" for="ch" forName="parTx"/>
-              <dgm:constr type="h" for="ch" forName="desTx" refType="h"/>
-              <dgm:constr type="l" for="ch" forName="desTx" refType="r" refFor="ch" refForName="parTx"/>
-              <dgm:constr type="t" for="ch" forName="desTx"/>
-            </dgm:constrLst>
-          </dgm:if>
-          <dgm:else name="Name11">
-            <dgm:constrLst>
-              <dgm:constr type="w" for="ch" forName="bgRect" refType="w"/>
-              <dgm:constr type="h" for="ch" forName="bgRect" refType="h"/>
-              <dgm:constr type="l" for="ch" forName="bgRect"/>
-              <dgm:constr type="t" for="ch" forName="bgRect"/>
-              <dgm:constr type="h" for="ch" forName="iconRect" refType="h" fact="0.55"/>
-              <dgm:constr type="w" for="ch" forName="iconRect" refType="h" refFor="ch" refForName="iconRect"/>
-              <dgm:constr type="l" for="ch" forName="iconRect" refType="h" refFor="ch" refForName="iconRect" fact="0.55"/>
-              <dgm:constr type="ctrY" for="ch" forName="iconRect" refType="ctrY" refFor="ch" refForName="bgRect"/>
-              <dgm:constr type="w" for="ch" forName="spaceRect" refType="l" refFor="ch" refForName="iconRect"/>
-              <dgm:constr type="h" for="ch" forName="spaceRect" refType="h"/>
-              <dgm:constr type="l" for="ch" forName="spaceRect" refType="r" refFor="ch" refForName="iconRect"/>
-              <dgm:constr type="t" for="ch" forName="spaceRect"/>
-              <dgm:constr type="h" for="ch" forName="parTx" refType="h"/>
-              <dgm:constr type="l" for="ch" forName="parTx" refType="r" refFor="ch" refForName="spaceRect"/>
-              <dgm:constr type="t" for="ch" forName="parTx"/>
-            </dgm:constrLst>
-          </dgm:else>
-        </dgm:choose>
-        <dgm:ruleLst>
-          <dgm:rule type="h" val="INF" fact="NaN" max="NaN"/>
-        </dgm:ruleLst>
-        <dgm:layoutNode name="bgRect" styleLbl="bgShp">
-          <dgm:alg type="sp"/>
-          <dgm:shape xmlns:r="http://schemas.openxmlformats.org/officeDocument/2006/relationships" type="roundRect" r:blip="">
-            <dgm:adjLst>
-              <dgm:adj idx="1" val="0.1"/>
-            </dgm:adjLst>
-          </dgm:shape>
-          <dgm:presOf/>
-          <dgm:constrLst/>
-          <dgm:ruleLst/>
-        </dgm:layoutNode>
-        <dgm:layoutNode name="iconRect" styleLbl="node1">
-          <dgm:alg type="sp"/>
-          <dgm:shape xmlns:r="http://schemas.openxmlformats.org/officeDocument/2006/relationships" type="rect" r:blip="" blipPhldr="1">
-            <dgm:adjLst/>
-          </dgm:shape>
-          <dgm:presOf/>
-          <dgm:constrLst/>
-          <dgm:ruleLst/>
-        </dgm:layoutNode>
-        <dgm:layoutNode name="spaceRect">
-          <dgm:alg type="sp"/>
-          <dgm:shape xmlns:r="http://schemas.openxmlformats.org/officeDocument/2006/relationships" r:blip="">
-            <dgm:adjLst/>
-          </dgm:shape>
-          <dgm:presOf/>
-          <dgm:constrLst/>
-          <dgm:ruleLst/>
-        </dgm:layoutNode>
-        <dgm:layoutNode name="parTx" styleLbl="revTx">
-          <dgm:varLst>
-            <dgm:chMax val="0"/>
-            <dgm:chPref val="0"/>
-          </dgm:varLst>
-          <dgm:alg type="tx">
-            <dgm:param type="txAnchorVert" val="mid"/>
-            <dgm:param type="parTxLTRAlign" val="l"/>
-            <dgm:param type="shpTxLTRAlignCh" val="l"/>
-            <dgm:param type="parTxRTLAlign" val="r"/>
-            <dgm:param type="shpTxRTLAlignCh" val="r"/>
-          </dgm:alg>
-          <dgm:shape xmlns:r="http://schemas.openxmlformats.org/officeDocument/2006/relationships" type="rect" r:blip="">
-            <dgm:adjLst/>
-          </dgm:shape>
-          <dgm:presOf axis="self" ptType="node"/>
-          <dgm:constrLst>
-            <dgm:constr type="lMarg" refType="h" fact="0.3"/>
-            <dgm:constr type="rMarg" refType="h" fact="0.3"/>
-            <dgm:constr type="tMarg" refType="h" fact="0.3"/>
-            <dgm:constr type="bMarg" refType="h" fact="0.3"/>
-          </dgm:constrLst>
-          <dgm:ruleLst>
-            <dgm:rule type="primFontSz" val="14" fact="NaN" max="NaN"/>
-            <dgm:rule type="h" val="INF" fact="NaN" max="NaN"/>
-          </dgm:ruleLst>
-        </dgm:layoutNode>
-        <dgm:choose name="Name12">
-          <dgm:if name="Name13" axis="ch" ptType="node" func="cnt" op="gte" val="1">
-            <dgm:layoutNode name="desTx" styleLbl="revTx">
-              <dgm:varLst/>
-              <dgm:alg type="tx">
-                <dgm:param type="txAnchorVertCh" val="mid"/>
-                <dgm:param type="parTxLTRAlign" val="l"/>
-                <dgm:param type="shpTxLTRAlignCh" val="l"/>
-                <dgm:param type="parTxRTLAlign" val="r"/>
-                <dgm:param type="shpTxRTLAlignCh" val="r"/>
-                <dgm:param type="stBulletLvl" val="0"/>
-              </dgm:alg>
-              <dgm:shape xmlns:r="http://schemas.openxmlformats.org/officeDocument/2006/relationships" type="rect" r:blip="">
-                <dgm:adjLst/>
-              </dgm:shape>
-              <dgm:presOf axis="des" ptType="node"/>
-              <dgm:constrLst>
-                <dgm:constr type="primFontSz" val="18"/>
-                <dgm:constr type="secFontSz" refType="primFontSz"/>
-                <dgm:constr type="lMarg" refType="h" fact="0.3"/>
-                <dgm:constr type="rMarg" refType="h" fact="0.3"/>
-                <dgm:constr type="tMarg" refType="h" fact="0.3"/>
-                <dgm:constr type="bMarg" refType="h" fact="0.3"/>
-              </dgm:constrLst>
-              <dgm:ruleLst>
-                <dgm:rule type="primFontSz" val="11" fact="NaN" max="NaN"/>
-              </dgm:ruleLst>
-            </dgm:layoutNode>
-          </dgm:if>
-          <dgm:else name="Name14"/>
-        </dgm:choose>
-      </dgm:layoutNode>
-      <dgm:forEach name="Name15" axis="followSib" ptType="sibTrans" cnt="1">
-        <dgm:layoutNode name="sibTrans">
-          <dgm:alg type="sp"/>
-          <dgm:shape xmlns:r="http://schemas.openxmlformats.org/officeDocument/2006/relationships" r:blip="">
-            <dgm:adjLst/>
-          </dgm:shape>
-          <dgm:presOf axis="self"/>
-          <dgm:constrLst/>
-          <dgm:ruleLst/>
-        </dgm:layoutNode>
-      </dgm:forEach>
-    </dgm:forEach>
-  </dgm:layoutNode>
-  <dgm:extLst>
-    <a:ext uri="{68A01E43-0DF5-4B5B-8FA6-DAF915123BFB}">
-      <dgm1612:lstStyle xmlns:dgm1612="http://schemas.microsoft.com/office/drawing/2016/12/diagram">
-        <a:lvl1pPr>
-          <a:lnSpc>
-            <a:spcPct val="100000"/>
-          </a:lnSpc>
-        </a:lvl1pPr>
-        <a:lvl2pPr>
-          <a:lnSpc>
-            <a:spcPct val="100000"/>
-          </a:lnSpc>
-        </a:lvl2pPr>
-      </dgm1612:lstStyle>
-    </a:ext>
-  </dgm:extLst>
-</dgm:layoutDef>
-</file>
-
-<file path=ppt/diagrams/layout7.xml><?xml version="1.0" encoding="utf-8"?>
 <dgm:layoutDef xmlns:dgm="http://schemas.openxmlformats.org/drawingml/2006/diagram" xmlns:a="http://schemas.openxmlformats.org/drawingml/2006/main" uniqueId="urn:microsoft.com/office/officeart/2018/2/layout/IconLabelList">
   <dgm:title val="Icon Label List"/>
   <dgm:desc val="Use to show non-sequential or grouped chunks of information accompanied by a related visuals. Works best with icons or small pictures with short text captions."/>
@@ -16132,7 +13841,7 @@
 </dgm:layoutDef>
 </file>
 
-<file path=ppt/diagrams/layout8.xml><?xml version="1.0" encoding="utf-8"?>
+<file path=ppt/diagrams/layout7.xml><?xml version="1.0" encoding="utf-8"?>
 <dgm:layoutDef xmlns:dgm="http://schemas.openxmlformats.org/drawingml/2006/diagram" xmlns:a="http://schemas.openxmlformats.org/drawingml/2006/main" uniqueId="urn:microsoft.com/office/officeart/2016/7/layout/LinearBlockProcessNumbered">
   <dgm:title val="Linear Block Process Numbered"/>
   <dgm:desc val="Used to show a progression; a timeline; sequential steps in a task, process, or workflow; or to emphasize movement or direction. Automatic numbers have been introduced to show the steps of the process. Level 1 text and Level 2 text both appears in a rectangle."/>
@@ -22603,1040 +20312,6 @@
 </file>
 
 <file path=ppt/diagrams/quickStyle7.xml><?xml version="1.0" encoding="utf-8"?>
-<dgm:styleDef xmlns:dgm="http://schemas.openxmlformats.org/drawingml/2006/diagram" xmlns:a="http://schemas.openxmlformats.org/drawingml/2006/main" uniqueId="urn:microsoft.com/office/officeart/2005/8/quickstyle/simple1">
-  <dgm:title val=""/>
-  <dgm:desc val=""/>
-  <dgm:catLst>
-    <dgm:cat type="simple" pri="10100"/>
-  </dgm:catLst>
-  <dgm:scene3d>
-    <a:camera prst="orthographicFront"/>
-    <a:lightRig rig="threePt" dir="t"/>
-  </dgm:scene3d>
-  <dgm:styleLbl name="node0">
-    <dgm:scene3d>
-      <a:camera prst="orthographicFront"/>
-      <a:lightRig rig="threePt" dir="t"/>
-    </dgm:scene3d>
-    <dgm:sp3d/>
-    <dgm:txPr/>
-    <dgm:style>
-      <a:lnRef idx="2">
-        <a:scrgbClr r="0" g="0" b="0"/>
-      </a:lnRef>
-      <a:fillRef idx="1">
-        <a:scrgbClr r="0" g="0" b="0"/>
-      </a:fillRef>
-      <a:effectRef idx="0">
-        <a:scrgbClr r="0" g="0" b="0"/>
-      </a:effectRef>
-      <a:fontRef idx="minor">
-        <a:schemeClr val="lt1"/>
-      </a:fontRef>
-    </dgm:style>
-  </dgm:styleLbl>
-  <dgm:styleLbl name="lnNode1">
-    <dgm:scene3d>
-      <a:camera prst="orthographicFront"/>
-      <a:lightRig rig="threePt" dir="t"/>
-    </dgm:scene3d>
-    <dgm:sp3d/>
-    <dgm:txPr/>
-    <dgm:style>
-      <a:lnRef idx="2">
-        <a:scrgbClr r="0" g="0" b="0"/>
-      </a:lnRef>
-      <a:fillRef idx="1">
-        <a:scrgbClr r="0" g="0" b="0"/>
-      </a:fillRef>
-      <a:effectRef idx="0">
-        <a:scrgbClr r="0" g="0" b="0"/>
-      </a:effectRef>
-      <a:fontRef idx="minor">
-        <a:schemeClr val="lt1"/>
-      </a:fontRef>
-    </dgm:style>
-  </dgm:styleLbl>
-  <dgm:styleLbl name="vennNode1">
-    <dgm:scene3d>
-      <a:camera prst="orthographicFront"/>
-      <a:lightRig rig="threePt" dir="t"/>
-    </dgm:scene3d>
-    <dgm:sp3d/>
-    <dgm:txPr/>
-    <dgm:style>
-      <a:lnRef idx="2">
-        <a:scrgbClr r="0" g="0" b="0"/>
-      </a:lnRef>
-      <a:fillRef idx="1">
-        <a:scrgbClr r="0" g="0" b="0"/>
-      </a:fillRef>
-      <a:effectRef idx="0">
-        <a:scrgbClr r="0" g="0" b="0"/>
-      </a:effectRef>
-      <a:fontRef idx="minor">
-        <a:schemeClr val="tx1"/>
-      </a:fontRef>
-    </dgm:style>
-  </dgm:styleLbl>
-  <dgm:styleLbl name="alignNode1">
-    <dgm:scene3d>
-      <a:camera prst="orthographicFront"/>
-      <a:lightRig rig="threePt" dir="t"/>
-    </dgm:scene3d>
-    <dgm:sp3d/>
-    <dgm:txPr/>
-    <dgm:style>
-      <a:lnRef idx="2">
-        <a:scrgbClr r="0" g="0" b="0"/>
-      </a:lnRef>
-      <a:fillRef idx="1">
-        <a:scrgbClr r="0" g="0" b="0"/>
-      </a:fillRef>
-      <a:effectRef idx="0">
-        <a:scrgbClr r="0" g="0" b="0"/>
-      </a:effectRef>
-      <a:fontRef idx="minor">
-        <a:schemeClr val="lt1"/>
-      </a:fontRef>
-    </dgm:style>
-  </dgm:styleLbl>
-  <dgm:styleLbl name="node1">
-    <dgm:scene3d>
-      <a:camera prst="orthographicFront"/>
-      <a:lightRig rig="threePt" dir="t"/>
-    </dgm:scene3d>
-    <dgm:sp3d/>
-    <dgm:txPr/>
-    <dgm:style>
-      <a:lnRef idx="2">
-        <a:scrgbClr r="0" g="0" b="0"/>
-      </a:lnRef>
-      <a:fillRef idx="1">
-        <a:scrgbClr r="0" g="0" b="0"/>
-      </a:fillRef>
-      <a:effectRef idx="0">
-        <a:scrgbClr r="0" g="0" b="0"/>
-      </a:effectRef>
-      <a:fontRef idx="minor">
-        <a:schemeClr val="lt1"/>
-      </a:fontRef>
-    </dgm:style>
-  </dgm:styleLbl>
-  <dgm:styleLbl name="node2">
-    <dgm:scene3d>
-      <a:camera prst="orthographicFront"/>
-      <a:lightRig rig="threePt" dir="t"/>
-    </dgm:scene3d>
-    <dgm:sp3d/>
-    <dgm:txPr/>
-    <dgm:style>
-      <a:lnRef idx="2">
-        <a:scrgbClr r="0" g="0" b="0"/>
-      </a:lnRef>
-      <a:fillRef idx="1">
-        <a:scrgbClr r="0" g="0" b="0"/>
-      </a:fillRef>
-      <a:effectRef idx="0">
-        <a:scrgbClr r="0" g="0" b="0"/>
-      </a:effectRef>
-      <a:fontRef idx="minor">
-        <a:schemeClr val="lt1"/>
-      </a:fontRef>
-    </dgm:style>
-  </dgm:styleLbl>
-  <dgm:styleLbl name="node3">
-    <dgm:scene3d>
-      <a:camera prst="orthographicFront"/>
-      <a:lightRig rig="threePt" dir="t"/>
-    </dgm:scene3d>
-    <dgm:sp3d/>
-    <dgm:txPr/>
-    <dgm:style>
-      <a:lnRef idx="2">
-        <a:scrgbClr r="0" g="0" b="0"/>
-      </a:lnRef>
-      <a:fillRef idx="1">
-        <a:scrgbClr r="0" g="0" b="0"/>
-      </a:fillRef>
-      <a:effectRef idx="0">
-        <a:scrgbClr r="0" g="0" b="0"/>
-      </a:effectRef>
-      <a:fontRef idx="minor">
-        <a:schemeClr val="lt1"/>
-      </a:fontRef>
-    </dgm:style>
-  </dgm:styleLbl>
-  <dgm:styleLbl name="node4">
-    <dgm:scene3d>
-      <a:camera prst="orthographicFront"/>
-      <a:lightRig rig="threePt" dir="t"/>
-    </dgm:scene3d>
-    <dgm:sp3d/>
-    <dgm:txPr/>
-    <dgm:style>
-      <a:lnRef idx="2">
-        <a:scrgbClr r="0" g="0" b="0"/>
-      </a:lnRef>
-      <a:fillRef idx="1">
-        <a:scrgbClr r="0" g="0" b="0"/>
-      </a:fillRef>
-      <a:effectRef idx="0">
-        <a:scrgbClr r="0" g="0" b="0"/>
-      </a:effectRef>
-      <a:fontRef idx="minor">
-        <a:schemeClr val="lt1"/>
-      </a:fontRef>
-    </dgm:style>
-  </dgm:styleLbl>
-  <dgm:styleLbl name="fgImgPlace1">
-    <dgm:scene3d>
-      <a:camera prst="orthographicFront"/>
-      <a:lightRig rig="threePt" dir="t"/>
-    </dgm:scene3d>
-    <dgm:sp3d/>
-    <dgm:txPr/>
-    <dgm:style>
-      <a:lnRef idx="2">
-        <a:scrgbClr r="0" g="0" b="0"/>
-      </a:lnRef>
-      <a:fillRef idx="1">
-        <a:scrgbClr r="0" g="0" b="0"/>
-      </a:fillRef>
-      <a:effectRef idx="0">
-        <a:scrgbClr r="0" g="0" b="0"/>
-      </a:effectRef>
-      <a:fontRef idx="minor"/>
-    </dgm:style>
-  </dgm:styleLbl>
-  <dgm:styleLbl name="alignImgPlace1">
-    <dgm:scene3d>
-      <a:camera prst="orthographicFront"/>
-      <a:lightRig rig="threePt" dir="t"/>
-    </dgm:scene3d>
-    <dgm:sp3d/>
-    <dgm:txPr/>
-    <dgm:style>
-      <a:lnRef idx="2">
-        <a:scrgbClr r="0" g="0" b="0"/>
-      </a:lnRef>
-      <a:fillRef idx="1">
-        <a:scrgbClr r="0" g="0" b="0"/>
-      </a:fillRef>
-      <a:effectRef idx="0">
-        <a:scrgbClr r="0" g="0" b="0"/>
-      </a:effectRef>
-      <a:fontRef idx="minor"/>
-    </dgm:style>
-  </dgm:styleLbl>
-  <dgm:styleLbl name="bgImgPlace1">
-    <dgm:scene3d>
-      <a:camera prst="orthographicFront"/>
-      <a:lightRig rig="threePt" dir="t"/>
-    </dgm:scene3d>
-    <dgm:sp3d/>
-    <dgm:txPr/>
-    <dgm:style>
-      <a:lnRef idx="2">
-        <a:scrgbClr r="0" g="0" b="0"/>
-      </a:lnRef>
-      <a:fillRef idx="1">
-        <a:scrgbClr r="0" g="0" b="0"/>
-      </a:fillRef>
-      <a:effectRef idx="0">
-        <a:scrgbClr r="0" g="0" b="0"/>
-      </a:effectRef>
-      <a:fontRef idx="minor"/>
-    </dgm:style>
-  </dgm:styleLbl>
-  <dgm:styleLbl name="sibTrans2D1">
-    <dgm:scene3d>
-      <a:camera prst="orthographicFront"/>
-      <a:lightRig rig="threePt" dir="t"/>
-    </dgm:scene3d>
-    <dgm:sp3d/>
-    <dgm:txPr/>
-    <dgm:style>
-      <a:lnRef idx="0">
-        <a:scrgbClr r="0" g="0" b="0"/>
-      </a:lnRef>
-      <a:fillRef idx="1">
-        <a:scrgbClr r="0" g="0" b="0"/>
-      </a:fillRef>
-      <a:effectRef idx="0">
-        <a:scrgbClr r="0" g="0" b="0"/>
-      </a:effectRef>
-      <a:fontRef idx="minor">
-        <a:schemeClr val="lt1"/>
-      </a:fontRef>
-    </dgm:style>
-  </dgm:styleLbl>
-  <dgm:styleLbl name="fgSibTrans2D1">
-    <dgm:scene3d>
-      <a:camera prst="orthographicFront"/>
-      <a:lightRig rig="threePt" dir="t"/>
-    </dgm:scene3d>
-    <dgm:sp3d/>
-    <dgm:txPr/>
-    <dgm:style>
-      <a:lnRef idx="0">
-        <a:scrgbClr r="0" g="0" b="0"/>
-      </a:lnRef>
-      <a:fillRef idx="1">
-        <a:scrgbClr r="0" g="0" b="0"/>
-      </a:fillRef>
-      <a:effectRef idx="0">
-        <a:scrgbClr r="0" g="0" b="0"/>
-      </a:effectRef>
-      <a:fontRef idx="minor">
-        <a:schemeClr val="lt1"/>
-      </a:fontRef>
-    </dgm:style>
-  </dgm:styleLbl>
-  <dgm:styleLbl name="bgSibTrans2D1">
-    <dgm:scene3d>
-      <a:camera prst="orthographicFront"/>
-      <a:lightRig rig="threePt" dir="t"/>
-    </dgm:scene3d>
-    <dgm:sp3d/>
-    <dgm:txPr/>
-    <dgm:style>
-      <a:lnRef idx="0">
-        <a:scrgbClr r="0" g="0" b="0"/>
-      </a:lnRef>
-      <a:fillRef idx="1">
-        <a:scrgbClr r="0" g="0" b="0"/>
-      </a:fillRef>
-      <a:effectRef idx="0">
-        <a:scrgbClr r="0" g="0" b="0"/>
-      </a:effectRef>
-      <a:fontRef idx="minor">
-        <a:schemeClr val="lt1"/>
-      </a:fontRef>
-    </dgm:style>
-  </dgm:styleLbl>
-  <dgm:styleLbl name="sibTrans1D1">
-    <dgm:scene3d>
-      <a:camera prst="orthographicFront"/>
-      <a:lightRig rig="threePt" dir="t"/>
-    </dgm:scene3d>
-    <dgm:sp3d/>
-    <dgm:txPr/>
-    <dgm:style>
-      <a:lnRef idx="1">
-        <a:scrgbClr r="0" g="0" b="0"/>
-      </a:lnRef>
-      <a:fillRef idx="0">
-        <a:scrgbClr r="0" g="0" b="0"/>
-      </a:fillRef>
-      <a:effectRef idx="0">
-        <a:scrgbClr r="0" g="0" b="0"/>
-      </a:effectRef>
-      <a:fontRef idx="minor"/>
-    </dgm:style>
-  </dgm:styleLbl>
-  <dgm:styleLbl name="callout">
-    <dgm:scene3d>
-      <a:camera prst="orthographicFront"/>
-      <a:lightRig rig="threePt" dir="t"/>
-    </dgm:scene3d>
-    <dgm:sp3d/>
-    <dgm:txPr/>
-    <dgm:style>
-      <a:lnRef idx="2">
-        <a:scrgbClr r="0" g="0" b="0"/>
-      </a:lnRef>
-      <a:fillRef idx="1">
-        <a:scrgbClr r="0" g="0" b="0"/>
-      </a:fillRef>
-      <a:effectRef idx="0">
-        <a:scrgbClr r="0" g="0" b="0"/>
-      </a:effectRef>
-      <a:fontRef idx="minor"/>
-    </dgm:style>
-  </dgm:styleLbl>
-  <dgm:styleLbl name="asst0">
-    <dgm:scene3d>
-      <a:camera prst="orthographicFront"/>
-      <a:lightRig rig="threePt" dir="t"/>
-    </dgm:scene3d>
-    <dgm:sp3d/>
-    <dgm:txPr/>
-    <dgm:style>
-      <a:lnRef idx="2">
-        <a:scrgbClr r="0" g="0" b="0"/>
-      </a:lnRef>
-      <a:fillRef idx="1">
-        <a:scrgbClr r="0" g="0" b="0"/>
-      </a:fillRef>
-      <a:effectRef idx="0">
-        <a:scrgbClr r="0" g="0" b="0"/>
-      </a:effectRef>
-      <a:fontRef idx="minor">
-        <a:schemeClr val="lt1"/>
-      </a:fontRef>
-    </dgm:style>
-  </dgm:styleLbl>
-  <dgm:styleLbl name="asst1">
-    <dgm:scene3d>
-      <a:camera prst="orthographicFront"/>
-      <a:lightRig rig="threePt" dir="t"/>
-    </dgm:scene3d>
-    <dgm:sp3d/>
-    <dgm:txPr/>
-    <dgm:style>
-      <a:lnRef idx="2">
-        <a:scrgbClr r="0" g="0" b="0"/>
-      </a:lnRef>
-      <a:fillRef idx="1">
-        <a:scrgbClr r="0" g="0" b="0"/>
-      </a:fillRef>
-      <a:effectRef idx="0">
-        <a:scrgbClr r="0" g="0" b="0"/>
-      </a:effectRef>
-      <a:fontRef idx="minor">
-        <a:schemeClr val="lt1"/>
-      </a:fontRef>
-    </dgm:style>
-  </dgm:styleLbl>
-  <dgm:styleLbl name="asst2">
-    <dgm:scene3d>
-      <a:camera prst="orthographicFront"/>
-      <a:lightRig rig="threePt" dir="t"/>
-    </dgm:scene3d>
-    <dgm:sp3d/>
-    <dgm:txPr/>
-    <dgm:style>
-      <a:lnRef idx="2">
-        <a:scrgbClr r="0" g="0" b="0"/>
-      </a:lnRef>
-      <a:fillRef idx="1">
-        <a:scrgbClr r="0" g="0" b="0"/>
-      </a:fillRef>
-      <a:effectRef idx="0">
-        <a:scrgbClr r="0" g="0" b="0"/>
-      </a:effectRef>
-      <a:fontRef idx="minor">
-        <a:schemeClr val="lt1"/>
-      </a:fontRef>
-    </dgm:style>
-  </dgm:styleLbl>
-  <dgm:styleLbl name="asst3">
-    <dgm:scene3d>
-      <a:camera prst="orthographicFront"/>
-      <a:lightRig rig="threePt" dir="t"/>
-    </dgm:scene3d>
-    <dgm:sp3d/>
-    <dgm:txPr/>
-    <dgm:style>
-      <a:lnRef idx="2">
-        <a:scrgbClr r="0" g="0" b="0"/>
-      </a:lnRef>
-      <a:fillRef idx="1">
-        <a:scrgbClr r="0" g="0" b="0"/>
-      </a:fillRef>
-      <a:effectRef idx="0">
-        <a:scrgbClr r="0" g="0" b="0"/>
-      </a:effectRef>
-      <a:fontRef idx="minor">
-        <a:schemeClr val="lt1"/>
-      </a:fontRef>
-    </dgm:style>
-  </dgm:styleLbl>
-  <dgm:styleLbl name="asst4">
-    <dgm:scene3d>
-      <a:camera prst="orthographicFront"/>
-      <a:lightRig rig="threePt" dir="t"/>
-    </dgm:scene3d>
-    <dgm:sp3d/>
-    <dgm:txPr/>
-    <dgm:style>
-      <a:lnRef idx="2">
-        <a:scrgbClr r="0" g="0" b="0"/>
-      </a:lnRef>
-      <a:fillRef idx="1">
-        <a:scrgbClr r="0" g="0" b="0"/>
-      </a:fillRef>
-      <a:effectRef idx="0">
-        <a:scrgbClr r="0" g="0" b="0"/>
-      </a:effectRef>
-      <a:fontRef idx="minor">
-        <a:schemeClr val="lt1"/>
-      </a:fontRef>
-    </dgm:style>
-  </dgm:styleLbl>
-  <dgm:styleLbl name="parChTrans2D1">
-    <dgm:scene3d>
-      <a:camera prst="orthographicFront"/>
-      <a:lightRig rig="threePt" dir="t"/>
-    </dgm:scene3d>
-    <dgm:sp3d/>
-    <dgm:txPr/>
-    <dgm:style>
-      <a:lnRef idx="2">
-        <a:scrgbClr r="0" g="0" b="0"/>
-      </a:lnRef>
-      <a:fillRef idx="1">
-        <a:scrgbClr r="0" g="0" b="0"/>
-      </a:fillRef>
-      <a:effectRef idx="0">
-        <a:scrgbClr r="0" g="0" b="0"/>
-      </a:effectRef>
-      <a:fontRef idx="minor">
-        <a:schemeClr val="lt1"/>
-      </a:fontRef>
-    </dgm:style>
-  </dgm:styleLbl>
-  <dgm:styleLbl name="parChTrans2D2">
-    <dgm:scene3d>
-      <a:camera prst="orthographicFront"/>
-      <a:lightRig rig="threePt" dir="t"/>
-    </dgm:scene3d>
-    <dgm:sp3d/>
-    <dgm:txPr/>
-    <dgm:style>
-      <a:lnRef idx="2">
-        <a:scrgbClr r="0" g="0" b="0"/>
-      </a:lnRef>
-      <a:fillRef idx="1">
-        <a:scrgbClr r="0" g="0" b="0"/>
-      </a:fillRef>
-      <a:effectRef idx="0">
-        <a:scrgbClr r="0" g="0" b="0"/>
-      </a:effectRef>
-      <a:fontRef idx="minor">
-        <a:schemeClr val="lt1"/>
-      </a:fontRef>
-    </dgm:style>
-  </dgm:styleLbl>
-  <dgm:styleLbl name="parChTrans2D3">
-    <dgm:scene3d>
-      <a:camera prst="orthographicFront"/>
-      <a:lightRig rig="threePt" dir="t"/>
-    </dgm:scene3d>
-    <dgm:sp3d/>
-    <dgm:txPr/>
-    <dgm:style>
-      <a:lnRef idx="2">
-        <a:scrgbClr r="0" g="0" b="0"/>
-      </a:lnRef>
-      <a:fillRef idx="1">
-        <a:scrgbClr r="0" g="0" b="0"/>
-      </a:fillRef>
-      <a:effectRef idx="0">
-        <a:scrgbClr r="0" g="0" b="0"/>
-      </a:effectRef>
-      <a:fontRef idx="minor">
-        <a:schemeClr val="lt1"/>
-      </a:fontRef>
-    </dgm:style>
-  </dgm:styleLbl>
-  <dgm:styleLbl name="parChTrans2D4">
-    <dgm:scene3d>
-      <a:camera prst="orthographicFront"/>
-      <a:lightRig rig="threePt" dir="t"/>
-    </dgm:scene3d>
-    <dgm:sp3d/>
-    <dgm:txPr/>
-    <dgm:style>
-      <a:lnRef idx="2">
-        <a:scrgbClr r="0" g="0" b="0"/>
-      </a:lnRef>
-      <a:fillRef idx="1">
-        <a:scrgbClr r="0" g="0" b="0"/>
-      </a:fillRef>
-      <a:effectRef idx="0">
-        <a:scrgbClr r="0" g="0" b="0"/>
-      </a:effectRef>
-      <a:fontRef idx="minor">
-        <a:schemeClr val="lt1"/>
-      </a:fontRef>
-    </dgm:style>
-  </dgm:styleLbl>
-  <dgm:styleLbl name="parChTrans1D1">
-    <dgm:scene3d>
-      <a:camera prst="orthographicFront"/>
-      <a:lightRig rig="threePt" dir="t"/>
-    </dgm:scene3d>
-    <dgm:sp3d/>
-    <dgm:txPr/>
-    <dgm:style>
-      <a:lnRef idx="2">
-        <a:scrgbClr r="0" g="0" b="0"/>
-      </a:lnRef>
-      <a:fillRef idx="0">
-        <a:scrgbClr r="0" g="0" b="0"/>
-      </a:fillRef>
-      <a:effectRef idx="0">
-        <a:scrgbClr r="0" g="0" b="0"/>
-      </a:effectRef>
-      <a:fontRef idx="minor"/>
-    </dgm:style>
-  </dgm:styleLbl>
-  <dgm:styleLbl name="parChTrans1D2">
-    <dgm:scene3d>
-      <a:camera prst="orthographicFront"/>
-      <a:lightRig rig="threePt" dir="t"/>
-    </dgm:scene3d>
-    <dgm:sp3d/>
-    <dgm:txPr/>
-    <dgm:style>
-      <a:lnRef idx="2">
-        <a:scrgbClr r="0" g="0" b="0"/>
-      </a:lnRef>
-      <a:fillRef idx="0">
-        <a:scrgbClr r="0" g="0" b="0"/>
-      </a:fillRef>
-      <a:effectRef idx="0">
-        <a:scrgbClr r="0" g="0" b="0"/>
-      </a:effectRef>
-      <a:fontRef idx="minor"/>
-    </dgm:style>
-  </dgm:styleLbl>
-  <dgm:styleLbl name="parChTrans1D3">
-    <dgm:scene3d>
-      <a:camera prst="orthographicFront"/>
-      <a:lightRig rig="threePt" dir="t"/>
-    </dgm:scene3d>
-    <dgm:sp3d/>
-    <dgm:txPr/>
-    <dgm:style>
-      <a:lnRef idx="2">
-        <a:scrgbClr r="0" g="0" b="0"/>
-      </a:lnRef>
-      <a:fillRef idx="0">
-        <a:scrgbClr r="0" g="0" b="0"/>
-      </a:fillRef>
-      <a:effectRef idx="0">
-        <a:scrgbClr r="0" g="0" b="0"/>
-      </a:effectRef>
-      <a:fontRef idx="minor"/>
-    </dgm:style>
-  </dgm:styleLbl>
-  <dgm:styleLbl name="parChTrans1D4">
-    <dgm:scene3d>
-      <a:camera prst="orthographicFront"/>
-      <a:lightRig rig="threePt" dir="t"/>
-    </dgm:scene3d>
-    <dgm:sp3d/>
-    <dgm:txPr/>
-    <dgm:style>
-      <a:lnRef idx="2">
-        <a:scrgbClr r="0" g="0" b="0"/>
-      </a:lnRef>
-      <a:fillRef idx="0">
-        <a:scrgbClr r="0" g="0" b="0"/>
-      </a:fillRef>
-      <a:effectRef idx="0">
-        <a:scrgbClr r="0" g="0" b="0"/>
-      </a:effectRef>
-      <a:fontRef idx="minor"/>
-    </dgm:style>
-  </dgm:styleLbl>
-  <dgm:styleLbl name="fgAcc1">
-    <dgm:scene3d>
-      <a:camera prst="orthographicFront"/>
-      <a:lightRig rig="threePt" dir="t"/>
-    </dgm:scene3d>
-    <dgm:sp3d/>
-    <dgm:txPr/>
-    <dgm:style>
-      <a:lnRef idx="2">
-        <a:scrgbClr r="0" g="0" b="0"/>
-      </a:lnRef>
-      <a:fillRef idx="1">
-        <a:scrgbClr r="0" g="0" b="0"/>
-      </a:fillRef>
-      <a:effectRef idx="0">
-        <a:scrgbClr r="0" g="0" b="0"/>
-      </a:effectRef>
-      <a:fontRef idx="minor"/>
-    </dgm:style>
-  </dgm:styleLbl>
-  <dgm:styleLbl name="conFgAcc1">
-    <dgm:scene3d>
-      <a:camera prst="orthographicFront"/>
-      <a:lightRig rig="threePt" dir="t"/>
-    </dgm:scene3d>
-    <dgm:sp3d/>
-    <dgm:txPr/>
-    <dgm:style>
-      <a:lnRef idx="2">
-        <a:scrgbClr r="0" g="0" b="0"/>
-      </a:lnRef>
-      <a:fillRef idx="1">
-        <a:scrgbClr r="0" g="0" b="0"/>
-      </a:fillRef>
-      <a:effectRef idx="0">
-        <a:scrgbClr r="0" g="0" b="0"/>
-      </a:effectRef>
-      <a:fontRef idx="minor"/>
-    </dgm:style>
-  </dgm:styleLbl>
-  <dgm:styleLbl name="alignAcc1">
-    <dgm:scene3d>
-      <a:camera prst="orthographicFront"/>
-      <a:lightRig rig="threePt" dir="t"/>
-    </dgm:scene3d>
-    <dgm:sp3d/>
-    <dgm:txPr/>
-    <dgm:style>
-      <a:lnRef idx="2">
-        <a:scrgbClr r="0" g="0" b="0"/>
-      </a:lnRef>
-      <a:fillRef idx="1">
-        <a:scrgbClr r="0" g="0" b="0"/>
-      </a:fillRef>
-      <a:effectRef idx="0">
-        <a:scrgbClr r="0" g="0" b="0"/>
-      </a:effectRef>
-      <a:fontRef idx="minor"/>
-    </dgm:style>
-  </dgm:styleLbl>
-  <dgm:styleLbl name="trAlignAcc1">
-    <dgm:scene3d>
-      <a:camera prst="orthographicFront"/>
-      <a:lightRig rig="threePt" dir="t"/>
-    </dgm:scene3d>
-    <dgm:sp3d/>
-    <dgm:txPr/>
-    <dgm:style>
-      <a:lnRef idx="1">
-        <a:scrgbClr r="0" g="0" b="0"/>
-      </a:lnRef>
-      <a:fillRef idx="1">
-        <a:scrgbClr r="0" g="0" b="0"/>
-      </a:fillRef>
-      <a:effectRef idx="0">
-        <a:scrgbClr r="0" g="0" b="0"/>
-      </a:effectRef>
-      <a:fontRef idx="minor"/>
-    </dgm:style>
-  </dgm:styleLbl>
-  <dgm:styleLbl name="bgAcc1">
-    <dgm:scene3d>
-      <a:camera prst="orthographicFront"/>
-      <a:lightRig rig="threePt" dir="t"/>
-    </dgm:scene3d>
-    <dgm:sp3d/>
-    <dgm:txPr/>
-    <dgm:style>
-      <a:lnRef idx="2">
-        <a:scrgbClr r="0" g="0" b="0"/>
-      </a:lnRef>
-      <a:fillRef idx="1">
-        <a:scrgbClr r="0" g="0" b="0"/>
-      </a:fillRef>
-      <a:effectRef idx="0">
-        <a:scrgbClr r="0" g="0" b="0"/>
-      </a:effectRef>
-      <a:fontRef idx="minor"/>
-    </dgm:style>
-  </dgm:styleLbl>
-  <dgm:styleLbl name="solidFgAcc1">
-    <dgm:scene3d>
-      <a:camera prst="orthographicFront"/>
-      <a:lightRig rig="threePt" dir="t"/>
-    </dgm:scene3d>
-    <dgm:sp3d/>
-    <dgm:txPr/>
-    <dgm:style>
-      <a:lnRef idx="2">
-        <a:scrgbClr r="0" g="0" b="0"/>
-      </a:lnRef>
-      <a:fillRef idx="1">
-        <a:scrgbClr r="0" g="0" b="0"/>
-      </a:fillRef>
-      <a:effectRef idx="0">
-        <a:scrgbClr r="0" g="0" b="0"/>
-      </a:effectRef>
-      <a:fontRef idx="minor"/>
-    </dgm:style>
-  </dgm:styleLbl>
-  <dgm:styleLbl name="solidAlignAcc1">
-    <dgm:scene3d>
-      <a:camera prst="orthographicFront"/>
-      <a:lightRig rig="threePt" dir="t"/>
-    </dgm:scene3d>
-    <dgm:sp3d/>
-    <dgm:txPr/>
-    <dgm:style>
-      <a:lnRef idx="2">
-        <a:scrgbClr r="0" g="0" b="0"/>
-      </a:lnRef>
-      <a:fillRef idx="1">
-        <a:scrgbClr r="0" g="0" b="0"/>
-      </a:fillRef>
-      <a:effectRef idx="0">
-        <a:scrgbClr r="0" g="0" b="0"/>
-      </a:effectRef>
-      <a:fontRef idx="minor"/>
-    </dgm:style>
-  </dgm:styleLbl>
-  <dgm:styleLbl name="solidBgAcc1">
-    <dgm:scene3d>
-      <a:camera prst="orthographicFront"/>
-      <a:lightRig rig="threePt" dir="t"/>
-    </dgm:scene3d>
-    <dgm:sp3d/>
-    <dgm:txPr/>
-    <dgm:style>
-      <a:lnRef idx="2">
-        <a:scrgbClr r="0" g="0" b="0"/>
-      </a:lnRef>
-      <a:fillRef idx="1">
-        <a:scrgbClr r="0" g="0" b="0"/>
-      </a:fillRef>
-      <a:effectRef idx="0">
-        <a:scrgbClr r="0" g="0" b="0"/>
-      </a:effectRef>
-      <a:fontRef idx="minor"/>
-    </dgm:style>
-  </dgm:styleLbl>
-  <dgm:styleLbl name="fgAccFollowNode1">
-    <dgm:scene3d>
-      <a:camera prst="orthographicFront"/>
-      <a:lightRig rig="threePt" dir="t"/>
-    </dgm:scene3d>
-    <dgm:sp3d/>
-    <dgm:txPr/>
-    <dgm:style>
-      <a:lnRef idx="2">
-        <a:scrgbClr r="0" g="0" b="0"/>
-      </a:lnRef>
-      <a:fillRef idx="1">
-        <a:scrgbClr r="0" g="0" b="0"/>
-      </a:fillRef>
-      <a:effectRef idx="0">
-        <a:scrgbClr r="0" g="0" b="0"/>
-      </a:effectRef>
-      <a:fontRef idx="minor"/>
-    </dgm:style>
-  </dgm:styleLbl>
-  <dgm:styleLbl name="alignAccFollowNode1">
-    <dgm:scene3d>
-      <a:camera prst="orthographicFront"/>
-      <a:lightRig rig="threePt" dir="t"/>
-    </dgm:scene3d>
-    <dgm:sp3d/>
-    <dgm:txPr/>
-    <dgm:style>
-      <a:lnRef idx="2">
-        <a:scrgbClr r="0" g="0" b="0"/>
-      </a:lnRef>
-      <a:fillRef idx="1">
-        <a:scrgbClr r="0" g="0" b="0"/>
-      </a:fillRef>
-      <a:effectRef idx="0">
-        <a:scrgbClr r="0" g="0" b="0"/>
-      </a:effectRef>
-      <a:fontRef idx="minor"/>
-    </dgm:style>
-  </dgm:styleLbl>
-  <dgm:styleLbl name="bgAccFollowNode1">
-    <dgm:scene3d>
-      <a:camera prst="orthographicFront"/>
-      <a:lightRig rig="threePt" dir="t"/>
-    </dgm:scene3d>
-    <dgm:sp3d/>
-    <dgm:txPr/>
-    <dgm:style>
-      <a:lnRef idx="2">
-        <a:scrgbClr r="0" g="0" b="0"/>
-      </a:lnRef>
-      <a:fillRef idx="1">
-        <a:scrgbClr r="0" g="0" b="0"/>
-      </a:fillRef>
-      <a:effectRef idx="0">
-        <a:scrgbClr r="0" g="0" b="0"/>
-      </a:effectRef>
-      <a:fontRef idx="minor"/>
-    </dgm:style>
-  </dgm:styleLbl>
-  <dgm:styleLbl name="fgAcc0">
-    <dgm:scene3d>
-      <a:camera prst="orthographicFront"/>
-      <a:lightRig rig="threePt" dir="t"/>
-    </dgm:scene3d>
-    <dgm:sp3d/>
-    <dgm:txPr/>
-    <dgm:style>
-      <a:lnRef idx="2">
-        <a:scrgbClr r="0" g="0" b="0"/>
-      </a:lnRef>
-      <a:fillRef idx="1">
-        <a:scrgbClr r="0" g="0" b="0"/>
-      </a:fillRef>
-      <a:effectRef idx="0">
-        <a:scrgbClr r="0" g="0" b="0"/>
-      </a:effectRef>
-      <a:fontRef idx="minor"/>
-    </dgm:style>
-  </dgm:styleLbl>
-  <dgm:styleLbl name="fgAcc2">
-    <dgm:scene3d>
-      <a:camera prst="orthographicFront"/>
-      <a:lightRig rig="threePt" dir="t"/>
-    </dgm:scene3d>
-    <dgm:sp3d/>
-    <dgm:txPr/>
-    <dgm:style>
-      <a:lnRef idx="2">
-        <a:scrgbClr r="0" g="0" b="0"/>
-      </a:lnRef>
-      <a:fillRef idx="1">
-        <a:scrgbClr r="0" g="0" b="0"/>
-      </a:fillRef>
-      <a:effectRef idx="0">
-        <a:scrgbClr r="0" g="0" b="0"/>
-      </a:effectRef>
-      <a:fontRef idx="minor"/>
-    </dgm:style>
-  </dgm:styleLbl>
-  <dgm:styleLbl name="fgAcc3">
-    <dgm:scene3d>
-      <a:camera prst="orthographicFront"/>
-      <a:lightRig rig="threePt" dir="t"/>
-    </dgm:scene3d>
-    <dgm:sp3d/>
-    <dgm:txPr/>
-    <dgm:style>
-      <a:lnRef idx="2">
-        <a:scrgbClr r="0" g="0" b="0"/>
-      </a:lnRef>
-      <a:fillRef idx="1">
-        <a:scrgbClr r="0" g="0" b="0"/>
-      </a:fillRef>
-      <a:effectRef idx="0">
-        <a:scrgbClr r="0" g="0" b="0"/>
-      </a:effectRef>
-      <a:fontRef idx="minor"/>
-    </dgm:style>
-  </dgm:styleLbl>
-  <dgm:styleLbl name="fgAcc4">
-    <dgm:scene3d>
-      <a:camera prst="orthographicFront"/>
-      <a:lightRig rig="threePt" dir="t"/>
-    </dgm:scene3d>
-    <dgm:sp3d/>
-    <dgm:txPr/>
-    <dgm:style>
-      <a:lnRef idx="2">
-        <a:scrgbClr r="0" g="0" b="0"/>
-      </a:lnRef>
-      <a:fillRef idx="1">
-        <a:scrgbClr r="0" g="0" b="0"/>
-      </a:fillRef>
-      <a:effectRef idx="0">
-        <a:scrgbClr r="0" g="0" b="0"/>
-      </a:effectRef>
-      <a:fontRef idx="minor"/>
-    </dgm:style>
-  </dgm:styleLbl>
-  <dgm:styleLbl name="bgShp">
-    <dgm:scene3d>
-      <a:camera prst="orthographicFront"/>
-      <a:lightRig rig="threePt" dir="t"/>
-    </dgm:scene3d>
-    <dgm:sp3d/>
-    <dgm:txPr/>
-    <dgm:style>
-      <a:lnRef idx="0">
-        <a:scrgbClr r="0" g="0" b="0"/>
-      </a:lnRef>
-      <a:fillRef idx="1">
-        <a:scrgbClr r="0" g="0" b="0"/>
-      </a:fillRef>
-      <a:effectRef idx="0">
-        <a:scrgbClr r="0" g="0" b="0"/>
-      </a:effectRef>
-      <a:fontRef idx="minor"/>
-    </dgm:style>
-  </dgm:styleLbl>
-  <dgm:styleLbl name="dkBgShp">
-    <dgm:scene3d>
-      <a:camera prst="orthographicFront"/>
-      <a:lightRig rig="threePt" dir="t"/>
-    </dgm:scene3d>
-    <dgm:sp3d/>
-    <dgm:txPr/>
-    <dgm:style>
-      <a:lnRef idx="0">
-        <a:scrgbClr r="0" g="0" b="0"/>
-      </a:lnRef>
-      <a:fillRef idx="1">
-        <a:scrgbClr r="0" g="0" b="0"/>
-      </a:fillRef>
-      <a:effectRef idx="0">
-        <a:scrgbClr r="0" g="0" b="0"/>
-      </a:effectRef>
-      <a:fontRef idx="minor"/>
-    </dgm:style>
-  </dgm:styleLbl>
-  <dgm:styleLbl name="trBgShp">
-    <dgm:scene3d>
-      <a:camera prst="orthographicFront"/>
-      <a:lightRig rig="threePt" dir="t"/>
-    </dgm:scene3d>
-    <dgm:sp3d/>
-    <dgm:txPr/>
-    <dgm:style>
-      <a:lnRef idx="0">
-        <a:scrgbClr r="0" g="0" b="0"/>
-      </a:lnRef>
-      <a:fillRef idx="1">
-        <a:scrgbClr r="0" g="0" b="0"/>
-      </a:fillRef>
-      <a:effectRef idx="0">
-        <a:scrgbClr r="0" g="0" b="0"/>
-      </a:effectRef>
-      <a:fontRef idx="minor"/>
-    </dgm:style>
-  </dgm:styleLbl>
-  <dgm:styleLbl name="fgShp">
-    <dgm:scene3d>
-      <a:camera prst="orthographicFront"/>
-      <a:lightRig rig="threePt" dir="t"/>
-    </dgm:scene3d>
-    <dgm:sp3d/>
-    <dgm:txPr/>
-    <dgm:style>
-      <a:lnRef idx="2">
-        <a:scrgbClr r="0" g="0" b="0"/>
-      </a:lnRef>
-      <a:fillRef idx="1">
-        <a:scrgbClr r="0" g="0" b="0"/>
-      </a:fillRef>
-      <a:effectRef idx="0">
-        <a:scrgbClr r="0" g="0" b="0"/>
-      </a:effectRef>
-      <a:fontRef idx="minor"/>
-    </dgm:style>
-  </dgm:styleLbl>
-  <dgm:styleLbl name="revTx">
-    <dgm:scene3d>
-      <a:camera prst="orthographicFront"/>
-      <a:lightRig rig="threePt" dir="t"/>
-    </dgm:scene3d>
-    <dgm:sp3d/>
-    <dgm:txPr/>
-    <dgm:style>
-      <a:lnRef idx="0">
-        <a:scrgbClr r="0" g="0" b="0"/>
-      </a:lnRef>
-      <a:fillRef idx="0">
-        <a:scrgbClr r="0" g="0" b="0"/>
-      </a:fillRef>
-      <a:effectRef idx="0">
-        <a:scrgbClr r="0" g="0" b="0"/>
-      </a:effectRef>
-      <a:fontRef idx="minor"/>
-    </dgm:style>
-  </dgm:styleLbl>
-</dgm:styleDef>
-</file>
-
-<file path=ppt/diagrams/quickStyle8.xml><?xml version="1.0" encoding="utf-8"?>
 <dgm:styleDef xmlns:dgm="http://schemas.openxmlformats.org/drawingml/2006/diagram" xmlns:a="http://schemas.openxmlformats.org/drawingml/2006/main" uniqueId="urn:microsoft.com/office/officeart/2005/8/quickstyle/simple1">
   <dgm:title val=""/>
   <dgm:desc val=""/>
@@ -24953,7 +21628,7 @@
           <a:p>
             <a:fld id="{E80C50CD-E178-4744-9B35-B2F624D6C5E9}" type="datetimeFigureOut">
               <a:rPr lang="en-US" smtClean="0"/>
-              <a:t>4/7/2026</a:t>
+              <a:t>4/21/2026</a:t>
             </a:fld>
             <a:endParaRPr lang="en-US"/>
           </a:p>
@@ -25151,7 +21826,7 @@
           <a:p>
             <a:fld id="{E80C50CD-E178-4744-9B35-B2F624D6C5E9}" type="datetimeFigureOut">
               <a:rPr lang="en-US" smtClean="0"/>
-              <a:t>4/7/2026</a:t>
+              <a:t>4/21/2026</a:t>
             </a:fld>
             <a:endParaRPr lang="en-US"/>
           </a:p>
@@ -25359,7 +22034,7 @@
           <a:p>
             <a:fld id="{E80C50CD-E178-4744-9B35-B2F624D6C5E9}" type="datetimeFigureOut">
               <a:rPr lang="en-US" smtClean="0"/>
-              <a:t>4/7/2026</a:t>
+              <a:t>4/21/2026</a:t>
             </a:fld>
             <a:endParaRPr lang="en-US"/>
           </a:p>
@@ -25609,7 +22284,7 @@
           <a:p>
             <a:fld id="{E80C50CD-E178-4744-9B35-B2F624D6C5E9}" type="datetimeFigureOut">
               <a:rPr lang="en-US" smtClean="0"/>
-              <a:t>4/7/2026</a:t>
+              <a:t>4/21/2026</a:t>
             </a:fld>
             <a:endParaRPr lang="en-US"/>
           </a:p>
@@ -25888,7 +22563,7 @@
           <a:p>
             <a:fld id="{E80C50CD-E178-4744-9B35-B2F624D6C5E9}" type="datetimeFigureOut">
               <a:rPr lang="en-US" smtClean="0"/>
-              <a:t>4/7/2026</a:t>
+              <a:t>4/21/2026</a:t>
             </a:fld>
             <a:endParaRPr lang="en-US"/>
           </a:p>
@@ -26205,7 +22880,7 @@
           <a:p>
             <a:fld id="{E80C50CD-E178-4744-9B35-B2F624D6C5E9}" type="datetimeFigureOut">
               <a:rPr lang="en-US" smtClean="0"/>
-              <a:t>4/7/2026</a:t>
+              <a:t>4/21/2026</a:t>
             </a:fld>
             <a:endParaRPr lang="en-US"/>
           </a:p>
@@ -26621,7 +23296,7 @@
           <a:p>
             <a:fld id="{E80C50CD-E178-4744-9B35-B2F624D6C5E9}" type="datetimeFigureOut">
               <a:rPr lang="en-US" smtClean="0"/>
-              <a:t>4/7/2026</a:t>
+              <a:t>4/21/2026</a:t>
             </a:fld>
             <a:endParaRPr lang="en-US"/>
           </a:p>
@@ -26762,7 +23437,7 @@
           <a:p>
             <a:fld id="{E80C50CD-E178-4744-9B35-B2F624D6C5E9}" type="datetimeFigureOut">
               <a:rPr lang="en-US" smtClean="0"/>
-              <a:t>4/7/2026</a:t>
+              <a:t>4/21/2026</a:t>
             </a:fld>
             <a:endParaRPr lang="en-US"/>
           </a:p>
@@ -26875,7 +23550,7 @@
           <a:p>
             <a:fld id="{E80C50CD-E178-4744-9B35-B2F624D6C5E9}" type="datetimeFigureOut">
               <a:rPr lang="en-US" smtClean="0"/>
-              <a:t>4/7/2026</a:t>
+              <a:t>4/21/2026</a:t>
             </a:fld>
             <a:endParaRPr lang="en-US"/>
           </a:p>
@@ -27192,7 +23867,7 @@
           <a:p>
             <a:fld id="{E80C50CD-E178-4744-9B35-B2F624D6C5E9}" type="datetimeFigureOut">
               <a:rPr lang="en-US" smtClean="0"/>
-              <a:t>4/7/2026</a:t>
+              <a:t>4/21/2026</a:t>
             </a:fld>
             <a:endParaRPr lang="en-US"/>
           </a:p>
@@ -27484,7 +24159,7 @@
           <a:p>
             <a:fld id="{E80C50CD-E178-4744-9B35-B2F624D6C5E9}" type="datetimeFigureOut">
               <a:rPr lang="en-US" smtClean="0"/>
-              <a:t>4/7/2026</a:t>
+              <a:t>4/21/2026</a:t>
             </a:fld>
             <a:endParaRPr lang="en-US"/>
           </a:p>
@@ -27724,7 +24399,7 @@
             <a:fld id="{E80C50CD-E178-4744-9B35-B2F624D6C5E9}" type="datetimeFigureOut">
               <a:rPr lang="en-US" smtClean="0"/>
               <a:pPr/>
-              <a:t>4/7/2026</a:t>
+              <a:t>4/21/2026</a:t>
             </a:fld>
             <a:endParaRPr lang="en-US"/>
           </a:p>
@@ -30189,37 +26864,206 @@
           </a:p>
         </p:txBody>
       </p:sp>
-      <p:graphicFrame>
-        <p:nvGraphicFramePr>
-          <p:cNvPr id="6" name="Rectangle 1">
-            <a:extLst>
-              <a:ext uri="{FF2B5EF4-FFF2-40B4-BE49-F238E27FC236}">
-                <a16:creationId xmlns:a16="http://schemas.microsoft.com/office/drawing/2014/main" id="{DAF4067F-5E54-3D2B-CE5E-E163B4CDE681}"/>
-              </a:ext>
-            </a:extLst>
-          </p:cNvPr>
-          <p:cNvGraphicFramePr>
-            <a:graphicFrameLocks noGrp="1"/>
-          </p:cNvGraphicFramePr>
-          <p:nvPr>
-            <p:ph idx="1"/>
-            <p:extLst>
-              <p:ext uri="{D42A27DB-BD31-4B8C-83A1-F6EECF244321}">
-                <p14:modId xmlns:p14="http://schemas.microsoft.com/office/powerpoint/2010/main" val="2099391329"/>
-              </p:ext>
-            </p:extLst>
-          </p:nvPr>
-        </p:nvGraphicFramePr>
-        <p:xfrm>
-          <a:off x="5065776" y="978408"/>
-          <a:ext cx="6620256" cy="5376672"/>
-        </p:xfrm>
-        <a:graphic>
-          <a:graphicData uri="http://schemas.openxmlformats.org/drawingml/2006/diagram">
-            <dgm:relIds xmlns:dgm="http://schemas.openxmlformats.org/drawingml/2006/diagram" xmlns:r="http://schemas.openxmlformats.org/officeDocument/2006/relationships" r:dm="rId2" r:lo="rId3" r:qs="rId4" r:cs="rId5"/>
-          </a:graphicData>
-        </a:graphic>
-      </p:graphicFrame>
+      <p:sp>
+        <p:nvSpPr>
+          <p:cNvPr id="100" name="AccuracyCard"/>
+          <p:cNvSpPr>
+            <a:spLocks noGrp="1"/>
+          </p:cNvSpPr>
+          <p:nvPr/>
+        </p:nvSpPr>
+        <p:spPr>
+          <a:xfrm>
+            <a:off x="4900000" y="900000"/>
+            <a:ext cx="3400000" cy="2200000"/>
+          </a:xfrm>
+          <a:prstGeom prst="roundRect">
+            <a:avLst>
+              <a:gd name="adj" fmla="val 16667"/>
+            </a:avLst>
+          </a:prstGeom>
+          <a:solidFill>
+            <a:srgbClr val="009DAE"/>
+          </a:solidFill>
+          <a:ln>
+            <a:noFill/>
+          </a:ln>
+        </p:spPr>
+        <p:txBody>
+          <a:bodyPr wrap="square" lIns="180000" tIns="180000" rIns="180000" bIns="180000" anchor="t"/>
+          <a:lstStyle/>
+          <a:p>
+            <a:r>
+              <a:rPr lang="en-KE" sz="1800" b="1" dirty="0">
+                <a:solidFill>
+                  <a:srgbClr val="FFFFFF"/>
+                </a:solidFill>
+              </a:rPr>
+              <a:t>Accuracy:</a:t>
+            </a:r>
+          </a:p>
+          <a:p>
+            <a:r>
+              <a:rPr lang="en-KE" sz="1400" b="0" dirty="0">
+                <a:solidFill>
+                  <a:srgbClr val="FFFFFF"/>
+                </a:solidFill>
+              </a:rPr>
+              <a:t>Overall measure of correct predictions across all 4 languages. Computed using accuracy_score from scikit-learn.</a:t>
+            </a:r>
+          </a:p>
+        </p:txBody>
+      </p:sp>
+      <p:sp>
+        <p:nvSpPr>
+          <p:cNvPr id="101" name="PRCard"/>
+          <p:cNvSpPr>
+            <a:spLocks noGrp="1"/>
+          </p:cNvSpPr>
+          <p:nvPr/>
+        </p:nvSpPr>
+        <p:spPr>
+          <a:xfrm>
+            <a:off x="8500000" y="900000"/>
+            <a:ext cx="3400000" cy="2200000"/>
+          </a:xfrm>
+          <a:prstGeom prst="roundRect">
+            <a:avLst>
+              <a:gd name="adj" fmla="val 16667"/>
+            </a:avLst>
+          </a:prstGeom>
+          <a:solidFill>
+            <a:srgbClr val="C0392B"/>
+          </a:solidFill>
+          <a:ln>
+            <a:noFill/>
+          </a:ln>
+        </p:spPr>
+        <p:txBody>
+          <a:bodyPr wrap="square" lIns="180000" tIns="180000" rIns="180000" bIns="180000" anchor="t"/>
+          <a:lstStyle/>
+          <a:p>
+            <a:r>
+              <a:rPr lang="en-KE" sz="1800" b="1" dirty="0">
+                <a:solidFill>
+                  <a:srgbClr val="FFFFFF"/>
+                </a:solidFill>
+              </a:rPr>
+              <a:t>Precision &amp; Recall:</a:t>
+            </a:r>
+          </a:p>
+          <a:p>
+            <a:r>
+              <a:rPr lang="en-KE" sz="1400" b="0" dirty="0">
+                <a:solidFill>
+                  <a:srgbClr val="FFFFFF"/>
+                </a:solidFill>
+              </a:rPr>
+              <a:t>Computed using precision_score and recall_score (average='weighted') from scikit-learn. Displayed in the sidebar and model comparison table.</a:t>
+            </a:r>
+          </a:p>
+        </p:txBody>
+      </p:sp>
+      <p:sp>
+        <p:nvSpPr>
+          <p:cNvPr id="102" name="F1Card"/>
+          <p:cNvSpPr>
+            <a:spLocks noGrp="1"/>
+          </p:cNvSpPr>
+          <p:nvPr/>
+        </p:nvSpPr>
+        <p:spPr>
+          <a:xfrm>
+            <a:off x="4900000" y="3300000"/>
+            <a:ext cx="3400000" cy="2200000"/>
+          </a:xfrm>
+          <a:prstGeom prst="roundRect">
+            <a:avLst>
+              <a:gd name="adj" fmla="val 16667"/>
+            </a:avLst>
+          </a:prstGeom>
+          <a:solidFill>
+            <a:srgbClr val="5B4FCF"/>
+          </a:solidFill>
+          <a:ln>
+            <a:noFill/>
+          </a:ln>
+        </p:spPr>
+        <p:txBody>
+          <a:bodyPr wrap="square" lIns="180000" tIns="180000" rIns="180000" bIns="180000" anchor="t"/>
+          <a:lstStyle/>
+          <a:p>
+            <a:r>
+              <a:rPr lang="en-KE" sz="1800" b="1" dirty="0">
+                <a:solidFill>
+                  <a:srgbClr val="FFFFFF"/>
+                </a:solidFill>
+              </a:rPr>
+              <a:t>F1-Score:</a:t>
+            </a:r>
+          </a:p>
+          <a:p>
+            <a:r>
+              <a:rPr lang="en-KE" sz="1400" b="0" dirty="0">
+                <a:solidFill>
+                  <a:srgbClr val="FFFFFF"/>
+                </a:solidFill>
+              </a:rPr>
+              <a:t>Weighted F1 computed via f1_score(average='weighted') to handle class imbalance across languages.</a:t>
+            </a:r>
+          </a:p>
+        </p:txBody>
+      </p:sp>
+      <p:sp>
+        <p:nvSpPr>
+          <p:cNvPr id="103" name="CMCard"/>
+          <p:cNvSpPr>
+            <a:spLocks noGrp="1"/>
+          </p:cNvSpPr>
+          <p:nvPr/>
+        </p:nvSpPr>
+        <p:spPr>
+          <a:xfrm>
+            <a:off x="8500000" y="3300000"/>
+            <a:ext cx="3400000" cy="2200000"/>
+          </a:xfrm>
+          <a:prstGeom prst="roundRect">
+            <a:avLst>
+              <a:gd name="adj" fmla="val 16667"/>
+            </a:avLst>
+          </a:prstGeom>
+          <a:solidFill>
+            <a:srgbClr val="E67E22"/>
+          </a:solidFill>
+          <a:ln>
+            <a:noFill/>
+          </a:ln>
+        </p:spPr>
+        <p:txBody>
+          <a:bodyPr wrap="square" lIns="180000" tIns="180000" rIns="180000" bIns="180000" anchor="t"/>
+          <a:lstStyle/>
+          <a:p>
+            <a:r>
+              <a:rPr lang="en-KE" sz="1800" b="1" dirty="0">
+                <a:solidFill>
+                  <a:srgbClr val="FFFFFF"/>
+                </a:solidFill>
+              </a:rPr>
+              <a:t>Confusion Matrix:</a:t>
+            </a:r>
+          </a:p>
+          <a:p>
+            <a:r>
+              <a:rPr lang="en-KE" sz="1400" b="0" dirty="0">
+                <a:solidFill>
+                  <a:srgbClr val="FFFFFF"/>
+                </a:solidFill>
+              </a:rPr>
+              <a:t>Visualized using ConfusionMatrixDisplay with a Blues colormap. Identifies how often the model confuses one language with another.</a:t>
+            </a:r>
+          </a:p>
+        </p:txBody>
+      </p:sp>
     </p:spTree>
     <p:extLst>
       <p:ext uri="{BB962C8B-B14F-4D97-AF65-F5344CB8AC3E}">
